--- a/presentation/Map_presen.pptx
+++ b/presentation/Map_presen.pptx
@@ -1,11 +1,13 @@
 
 <file path=ppt/presentation.xml><?xml version="1.0" encoding="utf-8"?>
-<p:presentation xmlns:a="http://schemas.openxmlformats.org/drawingml/2006/main" xmlns:r="http://schemas.openxmlformats.org/officeDocument/2006/relationships" xmlns:p="http://schemas.openxmlformats.org/presentationml/2006/main" saveSubsetFonts="1">
+<p:presentation xmlns:a="http://schemas.openxmlformats.org/drawingml/2006/main" xmlns:r="http://schemas.openxmlformats.org/officeDocument/2006/relationships" xmlns:p="http://schemas.openxmlformats.org/presentationml/2006/main">
   <p:sldMasterIdLst>
     <p:sldMasterId id="2147483648" r:id="rId1"/>
   </p:sldMasterIdLst>
   <p:sldIdLst>
-    <p:sldId id="256" r:id="rId2"/>
+    <p:sldId id="257" r:id="rId3"/>
+    <p:sldId id="258" r:id="rId4"/>
+    <p:sldId id="259" r:id="rId5"/>
   </p:sldIdLst>
   <p:sldSz cx="12192000" cy="6858000"/>
   <p:notesSz cx="6858000" cy="9144000"/>
@@ -126,13 +128,7 @@
       </p:grpSpPr>
       <p:sp>
         <p:nvSpPr>
-          <p:cNvPr id="2" name="タイトル 1">
-            <a:extLst>
-              <a:ext uri="{FF2B5EF4-FFF2-40B4-BE49-F238E27FC236}">
-                <a16:creationId xmlns:a16="http://schemas.microsoft.com/office/drawing/2014/main" id="{BD5C01E6-6675-C8E1-4DC4-1326AE4E428A}"/>
-              </a:ext>
-            </a:extLst>
-          </p:cNvPr>
+          <p:cNvPr id="2" name="タイトル 1"/>
           <p:cNvSpPr>
             <a:spLocks noGrp="1"/>
           </p:cNvSpPr>
@@ -158,18 +154,13 @@
               <a:rPr kumimoji="1" lang="ja-JP" altLang="en-US"/>
               <a:t>マスター タイトルの書式設定</a:t>
             </a:r>
-          </a:p>
-        </p:txBody>
-      </p:sp>
-      <p:sp>
-        <p:nvSpPr>
-          <p:cNvPr id="3" name="字幕 2">
-            <a:extLst>
-              <a:ext uri="{FF2B5EF4-FFF2-40B4-BE49-F238E27FC236}">
-                <a16:creationId xmlns:a16="http://schemas.microsoft.com/office/drawing/2014/main" id="{54EB00BC-20DE-ED6A-DA86-4ABDA703025D}"/>
-              </a:ext>
-            </a:extLst>
-          </p:cNvPr>
+            <a:endParaRPr kumimoji="1" lang="ja-JP" altLang="en-US"/>
+          </a:p>
+        </p:txBody>
+      </p:sp>
+      <p:sp>
+        <p:nvSpPr>
+          <p:cNvPr id="3" name="字幕 2"/>
           <p:cNvSpPr>
             <a:spLocks noGrp="1"/>
           </p:cNvSpPr>
@@ -228,18 +219,13 @@
               <a:rPr kumimoji="1" lang="ja-JP" altLang="en-US"/>
               <a:t>マスター サブタイトルの書式設定</a:t>
             </a:r>
-          </a:p>
-        </p:txBody>
-      </p:sp>
-      <p:sp>
-        <p:nvSpPr>
-          <p:cNvPr id="4" name="日付プレースホルダー 3">
-            <a:extLst>
-              <a:ext uri="{FF2B5EF4-FFF2-40B4-BE49-F238E27FC236}">
-                <a16:creationId xmlns:a16="http://schemas.microsoft.com/office/drawing/2014/main" id="{17FD3B46-D6BB-CC98-EA2A-9A7FB70B53D5}"/>
-              </a:ext>
-            </a:extLst>
-          </p:cNvPr>
+            <a:endParaRPr kumimoji="1" lang="ja-JP" altLang="en-US"/>
+          </a:p>
+        </p:txBody>
+      </p:sp>
+      <p:sp>
+        <p:nvSpPr>
+          <p:cNvPr id="4" name="日付プレースホルダー 3"/>
           <p:cNvSpPr>
             <a:spLocks noGrp="1"/>
           </p:cNvSpPr>
@@ -254,7 +240,6 @@
           <a:p>
             <a:fld id="{ED21A4C6-E72E-43B8-B868-83DE5C82B262}" type="datetimeFigureOut">
               <a:rPr kumimoji="1" lang="ja-JP" altLang="en-US" smtClean="0"/>
-              <a:t>2026/7/22</a:t>
             </a:fld>
             <a:endParaRPr kumimoji="1" lang="ja-JP" altLang="en-US"/>
           </a:p>
@@ -262,13 +247,7 @@
       </p:sp>
       <p:sp>
         <p:nvSpPr>
-          <p:cNvPr id="5" name="フッター プレースホルダー 4">
-            <a:extLst>
-              <a:ext uri="{FF2B5EF4-FFF2-40B4-BE49-F238E27FC236}">
-                <a16:creationId xmlns:a16="http://schemas.microsoft.com/office/drawing/2014/main" id="{D5CDF5F8-4871-2070-3658-6330E957B6F0}"/>
-              </a:ext>
-            </a:extLst>
-          </p:cNvPr>
+          <p:cNvPr id="5" name="フッター プレースホルダー 4"/>
           <p:cNvSpPr>
             <a:spLocks noGrp="1"/>
           </p:cNvSpPr>
@@ -287,13 +266,7 @@
       </p:sp>
       <p:sp>
         <p:nvSpPr>
-          <p:cNvPr id="6" name="スライド番号プレースホルダー 5">
-            <a:extLst>
-              <a:ext uri="{FF2B5EF4-FFF2-40B4-BE49-F238E27FC236}">
-                <a16:creationId xmlns:a16="http://schemas.microsoft.com/office/drawing/2014/main" id="{8E041D7F-EBD8-0E71-E92A-E8AA46F8AA65}"/>
-              </a:ext>
-            </a:extLst>
-          </p:cNvPr>
+          <p:cNvPr id="6" name="スライド番号プレースホルダー 5"/>
           <p:cNvSpPr>
             <a:spLocks noGrp="1"/>
           </p:cNvSpPr>
@@ -308,18 +281,12 @@
           <a:p>
             <a:fld id="{870758C8-7A29-49AC-A63D-B1FD04BD6167}" type="slidenum">
               <a:rPr kumimoji="1" lang="ja-JP" altLang="en-US" smtClean="0"/>
-              <a:t>‹#›</a:t>
             </a:fld>
             <a:endParaRPr kumimoji="1" lang="ja-JP" altLang="en-US"/>
           </a:p>
         </p:txBody>
       </p:sp>
     </p:spTree>
-    <p:extLst>
-      <p:ext uri="{BB962C8B-B14F-4D97-AF65-F5344CB8AC3E}">
-        <p14:creationId xmlns:p14="http://schemas.microsoft.com/office/powerpoint/2010/main" val="2929553373"/>
-      </p:ext>
-    </p:extLst>
   </p:cSld>
   <p:clrMapOvr>
     <a:masterClrMapping/>
@@ -346,13 +313,7 @@
       </p:grpSpPr>
       <p:sp>
         <p:nvSpPr>
-          <p:cNvPr id="2" name="タイトル 1">
-            <a:extLst>
-              <a:ext uri="{FF2B5EF4-FFF2-40B4-BE49-F238E27FC236}">
-                <a16:creationId xmlns:a16="http://schemas.microsoft.com/office/drawing/2014/main" id="{A2D1FD69-3684-FEE1-CE06-CD3C4062F84B}"/>
-              </a:ext>
-            </a:extLst>
-          </p:cNvPr>
+          <p:cNvPr id="2" name="タイトル 1"/>
           <p:cNvSpPr>
             <a:spLocks noGrp="1"/>
           </p:cNvSpPr>
@@ -369,18 +330,13 @@
               <a:rPr kumimoji="1" lang="ja-JP" altLang="en-US"/>
               <a:t>マスター タイトルの書式設定</a:t>
             </a:r>
-          </a:p>
-        </p:txBody>
-      </p:sp>
-      <p:sp>
-        <p:nvSpPr>
-          <p:cNvPr id="3" name="縦書きテキスト プレースホルダー 2">
-            <a:extLst>
-              <a:ext uri="{FF2B5EF4-FFF2-40B4-BE49-F238E27FC236}">
-                <a16:creationId xmlns:a16="http://schemas.microsoft.com/office/drawing/2014/main" id="{D713A521-06F6-56A2-0503-5C4DDDEDE302}"/>
-              </a:ext>
-            </a:extLst>
-          </p:cNvPr>
+            <a:endParaRPr kumimoji="1" lang="ja-JP" altLang="en-US"/>
+          </a:p>
+        </p:txBody>
+      </p:sp>
+      <p:sp>
+        <p:nvSpPr>
+          <p:cNvPr id="3" name="縦書きテキスト プレースホルダー 2"/>
           <p:cNvSpPr>
             <a:spLocks noGrp="1"/>
           </p:cNvSpPr>
@@ -398,6 +354,7 @@
               <a:rPr kumimoji="1" lang="ja-JP" altLang="en-US"/>
               <a:t>マスター テキストの書式設定</a:t>
             </a:r>
+            <a:endParaRPr kumimoji="1" lang="ja-JP" altLang="en-US"/>
           </a:p>
           <a:p>
             <a:pPr lvl="1"/>
@@ -413,6 +370,7 @@
               <a:rPr kumimoji="1" lang="ja-JP" altLang="en-US"/>
               <a:t>レベル</a:t>
             </a:r>
+            <a:endParaRPr kumimoji="1" lang="ja-JP" altLang="en-US"/>
           </a:p>
           <a:p>
             <a:pPr lvl="2"/>
@@ -428,6 +386,7 @@
               <a:rPr kumimoji="1" lang="ja-JP" altLang="en-US"/>
               <a:t>レベル</a:t>
             </a:r>
+            <a:endParaRPr kumimoji="1" lang="ja-JP" altLang="en-US"/>
           </a:p>
           <a:p>
             <a:pPr lvl="3"/>
@@ -443,6 +402,7 @@
               <a:rPr kumimoji="1" lang="ja-JP" altLang="en-US"/>
               <a:t>レベル</a:t>
             </a:r>
+            <a:endParaRPr kumimoji="1" lang="ja-JP" altLang="en-US"/>
           </a:p>
           <a:p>
             <a:pPr lvl="4"/>
@@ -458,18 +418,13 @@
               <a:rPr kumimoji="1" lang="ja-JP" altLang="en-US"/>
               <a:t>レベル</a:t>
             </a:r>
-          </a:p>
-        </p:txBody>
-      </p:sp>
-      <p:sp>
-        <p:nvSpPr>
-          <p:cNvPr id="4" name="日付プレースホルダー 3">
-            <a:extLst>
-              <a:ext uri="{FF2B5EF4-FFF2-40B4-BE49-F238E27FC236}">
-                <a16:creationId xmlns:a16="http://schemas.microsoft.com/office/drawing/2014/main" id="{23408C81-3C33-0DA3-99D4-4451AF932AE4}"/>
-              </a:ext>
-            </a:extLst>
-          </p:cNvPr>
+            <a:endParaRPr kumimoji="1" lang="ja-JP" altLang="en-US"/>
+          </a:p>
+        </p:txBody>
+      </p:sp>
+      <p:sp>
+        <p:nvSpPr>
+          <p:cNvPr id="4" name="日付プレースホルダー 3"/>
           <p:cNvSpPr>
             <a:spLocks noGrp="1"/>
           </p:cNvSpPr>
@@ -484,7 +439,6 @@
           <a:p>
             <a:fld id="{ED21A4C6-E72E-43B8-B868-83DE5C82B262}" type="datetimeFigureOut">
               <a:rPr kumimoji="1" lang="ja-JP" altLang="en-US" smtClean="0"/>
-              <a:t>2026/7/22</a:t>
             </a:fld>
             <a:endParaRPr kumimoji="1" lang="ja-JP" altLang="en-US"/>
           </a:p>
@@ -492,13 +446,7 @@
       </p:sp>
       <p:sp>
         <p:nvSpPr>
-          <p:cNvPr id="5" name="フッター プレースホルダー 4">
-            <a:extLst>
-              <a:ext uri="{FF2B5EF4-FFF2-40B4-BE49-F238E27FC236}">
-                <a16:creationId xmlns:a16="http://schemas.microsoft.com/office/drawing/2014/main" id="{12776D39-8704-F70F-7FA6-AA8C9B4E287D}"/>
-              </a:ext>
-            </a:extLst>
-          </p:cNvPr>
+          <p:cNvPr id="5" name="フッター プレースホルダー 4"/>
           <p:cNvSpPr>
             <a:spLocks noGrp="1"/>
           </p:cNvSpPr>
@@ -517,13 +465,7 @@
       </p:sp>
       <p:sp>
         <p:nvSpPr>
-          <p:cNvPr id="6" name="スライド番号プレースホルダー 5">
-            <a:extLst>
-              <a:ext uri="{FF2B5EF4-FFF2-40B4-BE49-F238E27FC236}">
-                <a16:creationId xmlns:a16="http://schemas.microsoft.com/office/drawing/2014/main" id="{92B6AC9A-4D3A-5E87-4ABC-6C526AC4F626}"/>
-              </a:ext>
-            </a:extLst>
-          </p:cNvPr>
+          <p:cNvPr id="6" name="スライド番号プレースホルダー 5"/>
           <p:cNvSpPr>
             <a:spLocks noGrp="1"/>
           </p:cNvSpPr>
@@ -538,18 +480,12 @@
           <a:p>
             <a:fld id="{870758C8-7A29-49AC-A63D-B1FD04BD6167}" type="slidenum">
               <a:rPr kumimoji="1" lang="ja-JP" altLang="en-US" smtClean="0"/>
-              <a:t>‹#›</a:t>
             </a:fld>
             <a:endParaRPr kumimoji="1" lang="ja-JP" altLang="en-US"/>
           </a:p>
         </p:txBody>
       </p:sp>
     </p:spTree>
-    <p:extLst>
-      <p:ext uri="{BB962C8B-B14F-4D97-AF65-F5344CB8AC3E}">
-        <p14:creationId xmlns:p14="http://schemas.microsoft.com/office/powerpoint/2010/main" val="3557486599"/>
-      </p:ext>
-    </p:extLst>
   </p:cSld>
   <p:clrMapOvr>
     <a:masterClrMapping/>
@@ -576,13 +512,7 @@
       </p:grpSpPr>
       <p:sp>
         <p:nvSpPr>
-          <p:cNvPr id="2" name="縦書きタイトル 1">
-            <a:extLst>
-              <a:ext uri="{FF2B5EF4-FFF2-40B4-BE49-F238E27FC236}">
-                <a16:creationId xmlns:a16="http://schemas.microsoft.com/office/drawing/2014/main" id="{7DF629B1-832A-752E-E0CF-95FAC4CF5179}"/>
-              </a:ext>
-            </a:extLst>
-          </p:cNvPr>
+          <p:cNvPr id="2" name="縦書きタイトル 1"/>
           <p:cNvSpPr>
             <a:spLocks noGrp="1"/>
           </p:cNvSpPr>
@@ -604,18 +534,13 @@
               <a:rPr kumimoji="1" lang="ja-JP" altLang="en-US"/>
               <a:t>マスター タイトルの書式設定</a:t>
             </a:r>
-          </a:p>
-        </p:txBody>
-      </p:sp>
-      <p:sp>
-        <p:nvSpPr>
-          <p:cNvPr id="3" name="縦書きテキスト プレースホルダー 2">
-            <a:extLst>
-              <a:ext uri="{FF2B5EF4-FFF2-40B4-BE49-F238E27FC236}">
-                <a16:creationId xmlns:a16="http://schemas.microsoft.com/office/drawing/2014/main" id="{0F2C7436-3AA5-A856-A57F-CC56E7733B37}"/>
-              </a:ext>
-            </a:extLst>
-          </p:cNvPr>
+            <a:endParaRPr kumimoji="1" lang="ja-JP" altLang="en-US"/>
+          </a:p>
+        </p:txBody>
+      </p:sp>
+      <p:sp>
+        <p:nvSpPr>
+          <p:cNvPr id="3" name="縦書きテキスト プレースホルダー 2"/>
           <p:cNvSpPr>
             <a:spLocks noGrp="1"/>
           </p:cNvSpPr>
@@ -638,6 +563,7 @@
               <a:rPr kumimoji="1" lang="ja-JP" altLang="en-US"/>
               <a:t>マスター テキストの書式設定</a:t>
             </a:r>
+            <a:endParaRPr kumimoji="1" lang="ja-JP" altLang="en-US"/>
           </a:p>
           <a:p>
             <a:pPr lvl="1"/>
@@ -653,6 +579,7 @@
               <a:rPr kumimoji="1" lang="ja-JP" altLang="en-US"/>
               <a:t>レベル</a:t>
             </a:r>
+            <a:endParaRPr kumimoji="1" lang="ja-JP" altLang="en-US"/>
           </a:p>
           <a:p>
             <a:pPr lvl="2"/>
@@ -668,6 +595,7 @@
               <a:rPr kumimoji="1" lang="ja-JP" altLang="en-US"/>
               <a:t>レベル</a:t>
             </a:r>
+            <a:endParaRPr kumimoji="1" lang="ja-JP" altLang="en-US"/>
           </a:p>
           <a:p>
             <a:pPr lvl="3"/>
@@ -683,6 +611,7 @@
               <a:rPr kumimoji="1" lang="ja-JP" altLang="en-US"/>
               <a:t>レベル</a:t>
             </a:r>
+            <a:endParaRPr kumimoji="1" lang="ja-JP" altLang="en-US"/>
           </a:p>
           <a:p>
             <a:pPr lvl="4"/>
@@ -698,18 +627,13 @@
               <a:rPr kumimoji="1" lang="ja-JP" altLang="en-US"/>
               <a:t>レベル</a:t>
             </a:r>
-          </a:p>
-        </p:txBody>
-      </p:sp>
-      <p:sp>
-        <p:nvSpPr>
-          <p:cNvPr id="4" name="日付プレースホルダー 3">
-            <a:extLst>
-              <a:ext uri="{FF2B5EF4-FFF2-40B4-BE49-F238E27FC236}">
-                <a16:creationId xmlns:a16="http://schemas.microsoft.com/office/drawing/2014/main" id="{235FA90F-7F41-76B0-C068-89FC6ED17C1E}"/>
-              </a:ext>
-            </a:extLst>
-          </p:cNvPr>
+            <a:endParaRPr kumimoji="1" lang="ja-JP" altLang="en-US"/>
+          </a:p>
+        </p:txBody>
+      </p:sp>
+      <p:sp>
+        <p:nvSpPr>
+          <p:cNvPr id="4" name="日付プレースホルダー 3"/>
           <p:cNvSpPr>
             <a:spLocks noGrp="1"/>
           </p:cNvSpPr>
@@ -724,7 +648,6 @@
           <a:p>
             <a:fld id="{ED21A4C6-E72E-43B8-B868-83DE5C82B262}" type="datetimeFigureOut">
               <a:rPr kumimoji="1" lang="ja-JP" altLang="en-US" smtClean="0"/>
-              <a:t>2026/7/22</a:t>
             </a:fld>
             <a:endParaRPr kumimoji="1" lang="ja-JP" altLang="en-US"/>
           </a:p>
@@ -732,13 +655,7 @@
       </p:sp>
       <p:sp>
         <p:nvSpPr>
-          <p:cNvPr id="5" name="フッター プレースホルダー 4">
-            <a:extLst>
-              <a:ext uri="{FF2B5EF4-FFF2-40B4-BE49-F238E27FC236}">
-                <a16:creationId xmlns:a16="http://schemas.microsoft.com/office/drawing/2014/main" id="{673BD5C8-6A29-00D9-EDB8-E9ED46210AAB}"/>
-              </a:ext>
-            </a:extLst>
-          </p:cNvPr>
+          <p:cNvPr id="5" name="フッター プレースホルダー 4"/>
           <p:cNvSpPr>
             <a:spLocks noGrp="1"/>
           </p:cNvSpPr>
@@ -757,13 +674,7 @@
       </p:sp>
       <p:sp>
         <p:nvSpPr>
-          <p:cNvPr id="6" name="スライド番号プレースホルダー 5">
-            <a:extLst>
-              <a:ext uri="{FF2B5EF4-FFF2-40B4-BE49-F238E27FC236}">
-                <a16:creationId xmlns:a16="http://schemas.microsoft.com/office/drawing/2014/main" id="{FF4CDCEF-D97B-65AD-3FF9-839D6EBE9809}"/>
-              </a:ext>
-            </a:extLst>
-          </p:cNvPr>
+          <p:cNvPr id="6" name="スライド番号プレースホルダー 5"/>
           <p:cNvSpPr>
             <a:spLocks noGrp="1"/>
           </p:cNvSpPr>
@@ -778,18 +689,12 @@
           <a:p>
             <a:fld id="{870758C8-7A29-49AC-A63D-B1FD04BD6167}" type="slidenum">
               <a:rPr kumimoji="1" lang="ja-JP" altLang="en-US" smtClean="0"/>
-              <a:t>‹#›</a:t>
             </a:fld>
             <a:endParaRPr kumimoji="1" lang="ja-JP" altLang="en-US"/>
           </a:p>
         </p:txBody>
       </p:sp>
     </p:spTree>
-    <p:extLst>
-      <p:ext uri="{BB962C8B-B14F-4D97-AF65-F5344CB8AC3E}">
-        <p14:creationId xmlns:p14="http://schemas.microsoft.com/office/powerpoint/2010/main" val="457652337"/>
-      </p:ext>
-    </p:extLst>
   </p:cSld>
   <p:clrMapOvr>
     <a:masterClrMapping/>
@@ -816,13 +721,7 @@
       </p:grpSpPr>
       <p:sp>
         <p:nvSpPr>
-          <p:cNvPr id="2" name="タイトル 1">
-            <a:extLst>
-              <a:ext uri="{FF2B5EF4-FFF2-40B4-BE49-F238E27FC236}">
-                <a16:creationId xmlns:a16="http://schemas.microsoft.com/office/drawing/2014/main" id="{287B0E96-B241-C8BF-52D8-2A72C1BCA156}"/>
-              </a:ext>
-            </a:extLst>
-          </p:cNvPr>
+          <p:cNvPr id="2" name="タイトル 1"/>
           <p:cNvSpPr>
             <a:spLocks noGrp="1"/>
           </p:cNvSpPr>
@@ -839,18 +738,13 @@
               <a:rPr kumimoji="1" lang="ja-JP" altLang="en-US"/>
               <a:t>マスター タイトルの書式設定</a:t>
             </a:r>
-          </a:p>
-        </p:txBody>
-      </p:sp>
-      <p:sp>
-        <p:nvSpPr>
-          <p:cNvPr id="3" name="コンテンツ プレースホルダー 2">
-            <a:extLst>
-              <a:ext uri="{FF2B5EF4-FFF2-40B4-BE49-F238E27FC236}">
-                <a16:creationId xmlns:a16="http://schemas.microsoft.com/office/drawing/2014/main" id="{B4ED0F00-4A21-AA63-6258-C1D31AE01FE0}"/>
-              </a:ext>
-            </a:extLst>
-          </p:cNvPr>
+            <a:endParaRPr kumimoji="1" lang="ja-JP" altLang="en-US"/>
+          </a:p>
+        </p:txBody>
+      </p:sp>
+      <p:sp>
+        <p:nvSpPr>
+          <p:cNvPr id="3" name="コンテンツ プレースホルダー 2"/>
           <p:cNvSpPr>
             <a:spLocks noGrp="1"/>
           </p:cNvSpPr>
@@ -868,6 +762,7 @@
               <a:rPr kumimoji="1" lang="ja-JP" altLang="en-US"/>
               <a:t>マスター テキストの書式設定</a:t>
             </a:r>
+            <a:endParaRPr kumimoji="1" lang="ja-JP" altLang="en-US"/>
           </a:p>
           <a:p>
             <a:pPr lvl="1"/>
@@ -883,6 +778,7 @@
               <a:rPr kumimoji="1" lang="ja-JP" altLang="en-US"/>
               <a:t>レベル</a:t>
             </a:r>
+            <a:endParaRPr kumimoji="1" lang="ja-JP" altLang="en-US"/>
           </a:p>
           <a:p>
             <a:pPr lvl="2"/>
@@ -898,6 +794,7 @@
               <a:rPr kumimoji="1" lang="ja-JP" altLang="en-US"/>
               <a:t>レベル</a:t>
             </a:r>
+            <a:endParaRPr kumimoji="1" lang="ja-JP" altLang="en-US"/>
           </a:p>
           <a:p>
             <a:pPr lvl="3"/>
@@ -913,6 +810,7 @@
               <a:rPr kumimoji="1" lang="ja-JP" altLang="en-US"/>
               <a:t>レベル</a:t>
             </a:r>
+            <a:endParaRPr kumimoji="1" lang="ja-JP" altLang="en-US"/>
           </a:p>
           <a:p>
             <a:pPr lvl="4"/>
@@ -928,18 +826,13 @@
               <a:rPr kumimoji="1" lang="ja-JP" altLang="en-US"/>
               <a:t>レベル</a:t>
             </a:r>
-          </a:p>
-        </p:txBody>
-      </p:sp>
-      <p:sp>
-        <p:nvSpPr>
-          <p:cNvPr id="4" name="日付プレースホルダー 3">
-            <a:extLst>
-              <a:ext uri="{FF2B5EF4-FFF2-40B4-BE49-F238E27FC236}">
-                <a16:creationId xmlns:a16="http://schemas.microsoft.com/office/drawing/2014/main" id="{8C8586D4-84D7-0584-8D03-3FF9819D7CF2}"/>
-              </a:ext>
-            </a:extLst>
-          </p:cNvPr>
+            <a:endParaRPr kumimoji="1" lang="ja-JP" altLang="en-US"/>
+          </a:p>
+        </p:txBody>
+      </p:sp>
+      <p:sp>
+        <p:nvSpPr>
+          <p:cNvPr id="4" name="日付プレースホルダー 3"/>
           <p:cNvSpPr>
             <a:spLocks noGrp="1"/>
           </p:cNvSpPr>
@@ -954,7 +847,6 @@
           <a:p>
             <a:fld id="{ED21A4C6-E72E-43B8-B868-83DE5C82B262}" type="datetimeFigureOut">
               <a:rPr kumimoji="1" lang="ja-JP" altLang="en-US" smtClean="0"/>
-              <a:t>2026/7/22</a:t>
             </a:fld>
             <a:endParaRPr kumimoji="1" lang="ja-JP" altLang="en-US"/>
           </a:p>
@@ -962,13 +854,7 @@
       </p:sp>
       <p:sp>
         <p:nvSpPr>
-          <p:cNvPr id="5" name="フッター プレースホルダー 4">
-            <a:extLst>
-              <a:ext uri="{FF2B5EF4-FFF2-40B4-BE49-F238E27FC236}">
-                <a16:creationId xmlns:a16="http://schemas.microsoft.com/office/drawing/2014/main" id="{11B402CC-316D-D0A6-A22D-8C157EE65643}"/>
-              </a:ext>
-            </a:extLst>
-          </p:cNvPr>
+          <p:cNvPr id="5" name="フッター プレースホルダー 4"/>
           <p:cNvSpPr>
             <a:spLocks noGrp="1"/>
           </p:cNvSpPr>
@@ -987,13 +873,7 @@
       </p:sp>
       <p:sp>
         <p:nvSpPr>
-          <p:cNvPr id="6" name="スライド番号プレースホルダー 5">
-            <a:extLst>
-              <a:ext uri="{FF2B5EF4-FFF2-40B4-BE49-F238E27FC236}">
-                <a16:creationId xmlns:a16="http://schemas.microsoft.com/office/drawing/2014/main" id="{38611157-3C01-071C-B55E-63B0104F1E99}"/>
-              </a:ext>
-            </a:extLst>
-          </p:cNvPr>
+          <p:cNvPr id="6" name="スライド番号プレースホルダー 5"/>
           <p:cNvSpPr>
             <a:spLocks noGrp="1"/>
           </p:cNvSpPr>
@@ -1008,18 +888,12 @@
           <a:p>
             <a:fld id="{870758C8-7A29-49AC-A63D-B1FD04BD6167}" type="slidenum">
               <a:rPr kumimoji="1" lang="ja-JP" altLang="en-US" smtClean="0"/>
-              <a:t>‹#›</a:t>
             </a:fld>
             <a:endParaRPr kumimoji="1" lang="ja-JP" altLang="en-US"/>
           </a:p>
         </p:txBody>
       </p:sp>
     </p:spTree>
-    <p:extLst>
-      <p:ext uri="{BB962C8B-B14F-4D97-AF65-F5344CB8AC3E}">
-        <p14:creationId xmlns:p14="http://schemas.microsoft.com/office/powerpoint/2010/main" val="2823173666"/>
-      </p:ext>
-    </p:extLst>
   </p:cSld>
   <p:clrMapOvr>
     <a:masterClrMapping/>
@@ -1046,13 +920,7 @@
       </p:grpSpPr>
       <p:sp>
         <p:nvSpPr>
-          <p:cNvPr id="2" name="タイトル 1">
-            <a:extLst>
-              <a:ext uri="{FF2B5EF4-FFF2-40B4-BE49-F238E27FC236}">
-                <a16:creationId xmlns:a16="http://schemas.microsoft.com/office/drawing/2014/main" id="{A16DCBB2-C2F8-61DA-06C0-5B2AED6AD6A0}"/>
-              </a:ext>
-            </a:extLst>
-          </p:cNvPr>
+          <p:cNvPr id="2" name="タイトル 1"/>
           <p:cNvSpPr>
             <a:spLocks noGrp="1"/>
           </p:cNvSpPr>
@@ -1078,18 +946,13 @@
               <a:rPr kumimoji="1" lang="ja-JP" altLang="en-US"/>
               <a:t>マスター タイトルの書式設定</a:t>
             </a:r>
-          </a:p>
-        </p:txBody>
-      </p:sp>
-      <p:sp>
-        <p:nvSpPr>
-          <p:cNvPr id="3" name="テキスト プレースホルダー 2">
-            <a:extLst>
-              <a:ext uri="{FF2B5EF4-FFF2-40B4-BE49-F238E27FC236}">
-                <a16:creationId xmlns:a16="http://schemas.microsoft.com/office/drawing/2014/main" id="{DC1CBFA9-C3B5-705D-C4F8-0F88BCFBF80A}"/>
-              </a:ext>
-            </a:extLst>
-          </p:cNvPr>
+            <a:endParaRPr kumimoji="1" lang="ja-JP" altLang="en-US"/>
+          </a:p>
+        </p:txBody>
+      </p:sp>
+      <p:sp>
+        <p:nvSpPr>
+          <p:cNvPr id="3" name="テキスト プレースホルダー 2"/>
           <p:cNvSpPr>
             <a:spLocks noGrp="1"/>
           </p:cNvSpPr>
@@ -1203,18 +1066,13 @@
               <a:rPr kumimoji="1" lang="ja-JP" altLang="en-US"/>
               <a:t>マスター テキストの書式設定</a:t>
             </a:r>
-          </a:p>
-        </p:txBody>
-      </p:sp>
-      <p:sp>
-        <p:nvSpPr>
-          <p:cNvPr id="4" name="日付プレースホルダー 3">
-            <a:extLst>
-              <a:ext uri="{FF2B5EF4-FFF2-40B4-BE49-F238E27FC236}">
-                <a16:creationId xmlns:a16="http://schemas.microsoft.com/office/drawing/2014/main" id="{947D326C-1A17-9F81-CF11-EFF3E177BAE1}"/>
-              </a:ext>
-            </a:extLst>
-          </p:cNvPr>
+            <a:endParaRPr kumimoji="1" lang="ja-JP" altLang="en-US"/>
+          </a:p>
+        </p:txBody>
+      </p:sp>
+      <p:sp>
+        <p:nvSpPr>
+          <p:cNvPr id="4" name="日付プレースホルダー 3"/>
           <p:cNvSpPr>
             <a:spLocks noGrp="1"/>
           </p:cNvSpPr>
@@ -1229,7 +1087,6 @@
           <a:p>
             <a:fld id="{ED21A4C6-E72E-43B8-B868-83DE5C82B262}" type="datetimeFigureOut">
               <a:rPr kumimoji="1" lang="ja-JP" altLang="en-US" smtClean="0"/>
-              <a:t>2026/7/22</a:t>
             </a:fld>
             <a:endParaRPr kumimoji="1" lang="ja-JP" altLang="en-US"/>
           </a:p>
@@ -1237,13 +1094,7 @@
       </p:sp>
       <p:sp>
         <p:nvSpPr>
-          <p:cNvPr id="5" name="フッター プレースホルダー 4">
-            <a:extLst>
-              <a:ext uri="{FF2B5EF4-FFF2-40B4-BE49-F238E27FC236}">
-                <a16:creationId xmlns:a16="http://schemas.microsoft.com/office/drawing/2014/main" id="{C84BE81D-3561-AC51-9770-2778548150FB}"/>
-              </a:ext>
-            </a:extLst>
-          </p:cNvPr>
+          <p:cNvPr id="5" name="フッター プレースホルダー 4"/>
           <p:cNvSpPr>
             <a:spLocks noGrp="1"/>
           </p:cNvSpPr>
@@ -1262,13 +1113,7 @@
       </p:sp>
       <p:sp>
         <p:nvSpPr>
-          <p:cNvPr id="6" name="スライド番号プレースホルダー 5">
-            <a:extLst>
-              <a:ext uri="{FF2B5EF4-FFF2-40B4-BE49-F238E27FC236}">
-                <a16:creationId xmlns:a16="http://schemas.microsoft.com/office/drawing/2014/main" id="{CA11DB5A-336E-9EFA-0267-85E0AC16D96A}"/>
-              </a:ext>
-            </a:extLst>
-          </p:cNvPr>
+          <p:cNvPr id="6" name="スライド番号プレースホルダー 5"/>
           <p:cNvSpPr>
             <a:spLocks noGrp="1"/>
           </p:cNvSpPr>
@@ -1283,18 +1128,12 @@
           <a:p>
             <a:fld id="{870758C8-7A29-49AC-A63D-B1FD04BD6167}" type="slidenum">
               <a:rPr kumimoji="1" lang="ja-JP" altLang="en-US" smtClean="0"/>
-              <a:t>‹#›</a:t>
             </a:fld>
             <a:endParaRPr kumimoji="1" lang="ja-JP" altLang="en-US"/>
           </a:p>
         </p:txBody>
       </p:sp>
     </p:spTree>
-    <p:extLst>
-      <p:ext uri="{BB962C8B-B14F-4D97-AF65-F5344CB8AC3E}">
-        <p14:creationId xmlns:p14="http://schemas.microsoft.com/office/powerpoint/2010/main" val="3519241821"/>
-      </p:ext>
-    </p:extLst>
   </p:cSld>
   <p:clrMapOvr>
     <a:masterClrMapping/>
@@ -1321,13 +1160,7 @@
       </p:grpSpPr>
       <p:sp>
         <p:nvSpPr>
-          <p:cNvPr id="2" name="タイトル 1">
-            <a:extLst>
-              <a:ext uri="{FF2B5EF4-FFF2-40B4-BE49-F238E27FC236}">
-                <a16:creationId xmlns:a16="http://schemas.microsoft.com/office/drawing/2014/main" id="{DE43F7A4-C18E-6096-7736-074AF25E2766}"/>
-              </a:ext>
-            </a:extLst>
-          </p:cNvPr>
+          <p:cNvPr id="2" name="タイトル 1"/>
           <p:cNvSpPr>
             <a:spLocks noGrp="1"/>
           </p:cNvSpPr>
@@ -1344,18 +1177,13 @@
               <a:rPr kumimoji="1" lang="ja-JP" altLang="en-US"/>
               <a:t>マスター タイトルの書式設定</a:t>
             </a:r>
-          </a:p>
-        </p:txBody>
-      </p:sp>
-      <p:sp>
-        <p:nvSpPr>
-          <p:cNvPr id="3" name="コンテンツ プレースホルダー 2">
-            <a:extLst>
-              <a:ext uri="{FF2B5EF4-FFF2-40B4-BE49-F238E27FC236}">
-                <a16:creationId xmlns:a16="http://schemas.microsoft.com/office/drawing/2014/main" id="{68D936B0-536E-07C7-C5B4-F5CFFE11419A}"/>
-              </a:ext>
-            </a:extLst>
-          </p:cNvPr>
+            <a:endParaRPr kumimoji="1" lang="ja-JP" altLang="en-US"/>
+          </a:p>
+        </p:txBody>
+      </p:sp>
+      <p:sp>
+        <p:nvSpPr>
+          <p:cNvPr id="3" name="コンテンツ プレースホルダー 2"/>
           <p:cNvSpPr>
             <a:spLocks noGrp="1"/>
           </p:cNvSpPr>
@@ -1378,6 +1206,7 @@
               <a:rPr kumimoji="1" lang="ja-JP" altLang="en-US"/>
               <a:t>マスター テキストの書式設定</a:t>
             </a:r>
+            <a:endParaRPr kumimoji="1" lang="ja-JP" altLang="en-US"/>
           </a:p>
           <a:p>
             <a:pPr lvl="1"/>
@@ -1393,6 +1222,7 @@
               <a:rPr kumimoji="1" lang="ja-JP" altLang="en-US"/>
               <a:t>レベル</a:t>
             </a:r>
+            <a:endParaRPr kumimoji="1" lang="ja-JP" altLang="en-US"/>
           </a:p>
           <a:p>
             <a:pPr lvl="2"/>
@@ -1408,6 +1238,7 @@
               <a:rPr kumimoji="1" lang="ja-JP" altLang="en-US"/>
               <a:t>レベル</a:t>
             </a:r>
+            <a:endParaRPr kumimoji="1" lang="ja-JP" altLang="en-US"/>
           </a:p>
           <a:p>
             <a:pPr lvl="3"/>
@@ -1423,6 +1254,7 @@
               <a:rPr kumimoji="1" lang="ja-JP" altLang="en-US"/>
               <a:t>レベル</a:t>
             </a:r>
+            <a:endParaRPr kumimoji="1" lang="ja-JP" altLang="en-US"/>
           </a:p>
           <a:p>
             <a:pPr lvl="4"/>
@@ -1438,18 +1270,13 @@
               <a:rPr kumimoji="1" lang="ja-JP" altLang="en-US"/>
               <a:t>レベル</a:t>
             </a:r>
-          </a:p>
-        </p:txBody>
-      </p:sp>
-      <p:sp>
-        <p:nvSpPr>
-          <p:cNvPr id="4" name="コンテンツ プレースホルダー 3">
-            <a:extLst>
-              <a:ext uri="{FF2B5EF4-FFF2-40B4-BE49-F238E27FC236}">
-                <a16:creationId xmlns:a16="http://schemas.microsoft.com/office/drawing/2014/main" id="{A3710107-8EA3-53B8-8E34-A5B7053C43B5}"/>
-              </a:ext>
-            </a:extLst>
-          </p:cNvPr>
+            <a:endParaRPr kumimoji="1" lang="ja-JP" altLang="en-US"/>
+          </a:p>
+        </p:txBody>
+      </p:sp>
+      <p:sp>
+        <p:nvSpPr>
+          <p:cNvPr id="4" name="コンテンツ プレースホルダー 3"/>
           <p:cNvSpPr>
             <a:spLocks noGrp="1"/>
           </p:cNvSpPr>
@@ -1472,6 +1299,7 @@
               <a:rPr kumimoji="1" lang="ja-JP" altLang="en-US"/>
               <a:t>マスター テキストの書式設定</a:t>
             </a:r>
+            <a:endParaRPr kumimoji="1" lang="ja-JP" altLang="en-US"/>
           </a:p>
           <a:p>
             <a:pPr lvl="1"/>
@@ -1487,6 +1315,7 @@
               <a:rPr kumimoji="1" lang="ja-JP" altLang="en-US"/>
               <a:t>レベル</a:t>
             </a:r>
+            <a:endParaRPr kumimoji="1" lang="ja-JP" altLang="en-US"/>
           </a:p>
           <a:p>
             <a:pPr lvl="2"/>
@@ -1502,6 +1331,7 @@
               <a:rPr kumimoji="1" lang="ja-JP" altLang="en-US"/>
               <a:t>レベル</a:t>
             </a:r>
+            <a:endParaRPr kumimoji="1" lang="ja-JP" altLang="en-US"/>
           </a:p>
           <a:p>
             <a:pPr lvl="3"/>
@@ -1517,6 +1347,7 @@
               <a:rPr kumimoji="1" lang="ja-JP" altLang="en-US"/>
               <a:t>レベル</a:t>
             </a:r>
+            <a:endParaRPr kumimoji="1" lang="ja-JP" altLang="en-US"/>
           </a:p>
           <a:p>
             <a:pPr lvl="4"/>
@@ -1532,18 +1363,13 @@
               <a:rPr kumimoji="1" lang="ja-JP" altLang="en-US"/>
               <a:t>レベル</a:t>
             </a:r>
-          </a:p>
-        </p:txBody>
-      </p:sp>
-      <p:sp>
-        <p:nvSpPr>
-          <p:cNvPr id="5" name="日付プレースホルダー 4">
-            <a:extLst>
-              <a:ext uri="{FF2B5EF4-FFF2-40B4-BE49-F238E27FC236}">
-                <a16:creationId xmlns:a16="http://schemas.microsoft.com/office/drawing/2014/main" id="{3C28D5F1-3449-3C39-AEAE-9AA969E48930}"/>
-              </a:ext>
-            </a:extLst>
-          </p:cNvPr>
+            <a:endParaRPr kumimoji="1" lang="ja-JP" altLang="en-US"/>
+          </a:p>
+        </p:txBody>
+      </p:sp>
+      <p:sp>
+        <p:nvSpPr>
+          <p:cNvPr id="5" name="日付プレースホルダー 4"/>
           <p:cNvSpPr>
             <a:spLocks noGrp="1"/>
           </p:cNvSpPr>
@@ -1558,7 +1384,6 @@
           <a:p>
             <a:fld id="{ED21A4C6-E72E-43B8-B868-83DE5C82B262}" type="datetimeFigureOut">
               <a:rPr kumimoji="1" lang="ja-JP" altLang="en-US" smtClean="0"/>
-              <a:t>2026/7/22</a:t>
             </a:fld>
             <a:endParaRPr kumimoji="1" lang="ja-JP" altLang="en-US"/>
           </a:p>
@@ -1566,13 +1391,7 @@
       </p:sp>
       <p:sp>
         <p:nvSpPr>
-          <p:cNvPr id="6" name="フッター プレースホルダー 5">
-            <a:extLst>
-              <a:ext uri="{FF2B5EF4-FFF2-40B4-BE49-F238E27FC236}">
-                <a16:creationId xmlns:a16="http://schemas.microsoft.com/office/drawing/2014/main" id="{2F494008-BA5D-ED61-7CB5-AFEEEB83B8EC}"/>
-              </a:ext>
-            </a:extLst>
-          </p:cNvPr>
+          <p:cNvPr id="6" name="フッター プレースホルダー 5"/>
           <p:cNvSpPr>
             <a:spLocks noGrp="1"/>
           </p:cNvSpPr>
@@ -1591,13 +1410,7 @@
       </p:sp>
       <p:sp>
         <p:nvSpPr>
-          <p:cNvPr id="7" name="スライド番号プレースホルダー 6">
-            <a:extLst>
-              <a:ext uri="{FF2B5EF4-FFF2-40B4-BE49-F238E27FC236}">
-                <a16:creationId xmlns:a16="http://schemas.microsoft.com/office/drawing/2014/main" id="{53796203-0596-02A8-B939-8FD795E7A9DC}"/>
-              </a:ext>
-            </a:extLst>
-          </p:cNvPr>
+          <p:cNvPr id="7" name="スライド番号プレースホルダー 6"/>
           <p:cNvSpPr>
             <a:spLocks noGrp="1"/>
           </p:cNvSpPr>
@@ -1612,18 +1425,12 @@
           <a:p>
             <a:fld id="{870758C8-7A29-49AC-A63D-B1FD04BD6167}" type="slidenum">
               <a:rPr kumimoji="1" lang="ja-JP" altLang="en-US" smtClean="0"/>
-              <a:t>‹#›</a:t>
             </a:fld>
             <a:endParaRPr kumimoji="1" lang="ja-JP" altLang="en-US"/>
           </a:p>
         </p:txBody>
       </p:sp>
     </p:spTree>
-    <p:extLst>
-      <p:ext uri="{BB962C8B-B14F-4D97-AF65-F5344CB8AC3E}">
-        <p14:creationId xmlns:p14="http://schemas.microsoft.com/office/powerpoint/2010/main" val="3757227986"/>
-      </p:ext>
-    </p:extLst>
   </p:cSld>
   <p:clrMapOvr>
     <a:masterClrMapping/>
@@ -1650,13 +1457,7 @@
       </p:grpSpPr>
       <p:sp>
         <p:nvSpPr>
-          <p:cNvPr id="2" name="タイトル 1">
-            <a:extLst>
-              <a:ext uri="{FF2B5EF4-FFF2-40B4-BE49-F238E27FC236}">
-                <a16:creationId xmlns:a16="http://schemas.microsoft.com/office/drawing/2014/main" id="{46FC2F0E-FC45-303D-A2A4-37C9C5D53A5D}"/>
-              </a:ext>
-            </a:extLst>
-          </p:cNvPr>
+          <p:cNvPr id="2" name="タイトル 1"/>
           <p:cNvSpPr>
             <a:spLocks noGrp="1"/>
           </p:cNvSpPr>
@@ -1678,18 +1479,13 @@
               <a:rPr kumimoji="1" lang="ja-JP" altLang="en-US"/>
               <a:t>マスター タイトルの書式設定</a:t>
             </a:r>
-          </a:p>
-        </p:txBody>
-      </p:sp>
-      <p:sp>
-        <p:nvSpPr>
-          <p:cNvPr id="3" name="テキスト プレースホルダー 2">
-            <a:extLst>
-              <a:ext uri="{FF2B5EF4-FFF2-40B4-BE49-F238E27FC236}">
-                <a16:creationId xmlns:a16="http://schemas.microsoft.com/office/drawing/2014/main" id="{97B5BD2E-8B36-CEF4-6ED2-0C46DE6D9B98}"/>
-              </a:ext>
-            </a:extLst>
-          </p:cNvPr>
+            <a:endParaRPr kumimoji="1" lang="ja-JP" altLang="en-US"/>
+          </a:p>
+        </p:txBody>
+      </p:sp>
+      <p:sp>
+        <p:nvSpPr>
+          <p:cNvPr id="3" name="テキスト プレースホルダー 2"/>
           <p:cNvSpPr>
             <a:spLocks noGrp="1"/>
           </p:cNvSpPr>
@@ -1749,18 +1545,13 @@
               <a:rPr kumimoji="1" lang="ja-JP" altLang="en-US"/>
               <a:t>マスター テキストの書式設定</a:t>
             </a:r>
-          </a:p>
-        </p:txBody>
-      </p:sp>
-      <p:sp>
-        <p:nvSpPr>
-          <p:cNvPr id="4" name="コンテンツ プレースホルダー 3">
-            <a:extLst>
-              <a:ext uri="{FF2B5EF4-FFF2-40B4-BE49-F238E27FC236}">
-                <a16:creationId xmlns:a16="http://schemas.microsoft.com/office/drawing/2014/main" id="{14FEC50E-27B1-2A4D-A902-4994B33DB074}"/>
-              </a:ext>
-            </a:extLst>
-          </p:cNvPr>
+            <a:endParaRPr kumimoji="1" lang="ja-JP" altLang="en-US"/>
+          </a:p>
+        </p:txBody>
+      </p:sp>
+      <p:sp>
+        <p:nvSpPr>
+          <p:cNvPr id="4" name="コンテンツ プレースホルダー 3"/>
           <p:cNvSpPr>
             <a:spLocks noGrp="1"/>
           </p:cNvSpPr>
@@ -1783,6 +1574,7 @@
               <a:rPr kumimoji="1" lang="ja-JP" altLang="en-US"/>
               <a:t>マスター テキストの書式設定</a:t>
             </a:r>
+            <a:endParaRPr kumimoji="1" lang="ja-JP" altLang="en-US"/>
           </a:p>
           <a:p>
             <a:pPr lvl="1"/>
@@ -1798,6 +1590,7 @@
               <a:rPr kumimoji="1" lang="ja-JP" altLang="en-US"/>
               <a:t>レベル</a:t>
             </a:r>
+            <a:endParaRPr kumimoji="1" lang="ja-JP" altLang="en-US"/>
           </a:p>
           <a:p>
             <a:pPr lvl="2"/>
@@ -1813,6 +1606,7 @@
               <a:rPr kumimoji="1" lang="ja-JP" altLang="en-US"/>
               <a:t>レベル</a:t>
             </a:r>
+            <a:endParaRPr kumimoji="1" lang="ja-JP" altLang="en-US"/>
           </a:p>
           <a:p>
             <a:pPr lvl="3"/>
@@ -1828,6 +1622,7 @@
               <a:rPr kumimoji="1" lang="ja-JP" altLang="en-US"/>
               <a:t>レベル</a:t>
             </a:r>
+            <a:endParaRPr kumimoji="1" lang="ja-JP" altLang="en-US"/>
           </a:p>
           <a:p>
             <a:pPr lvl="4"/>
@@ -1843,18 +1638,13 @@
               <a:rPr kumimoji="1" lang="ja-JP" altLang="en-US"/>
               <a:t>レベル</a:t>
             </a:r>
-          </a:p>
-        </p:txBody>
-      </p:sp>
-      <p:sp>
-        <p:nvSpPr>
-          <p:cNvPr id="5" name="テキスト プレースホルダー 4">
-            <a:extLst>
-              <a:ext uri="{FF2B5EF4-FFF2-40B4-BE49-F238E27FC236}">
-                <a16:creationId xmlns:a16="http://schemas.microsoft.com/office/drawing/2014/main" id="{1D457C33-8067-5B32-970C-EBDCF0090105}"/>
-              </a:ext>
-            </a:extLst>
-          </p:cNvPr>
+            <a:endParaRPr kumimoji="1" lang="ja-JP" altLang="en-US"/>
+          </a:p>
+        </p:txBody>
+      </p:sp>
+      <p:sp>
+        <p:nvSpPr>
+          <p:cNvPr id="5" name="テキスト プレースホルダー 4"/>
           <p:cNvSpPr>
             <a:spLocks noGrp="1"/>
           </p:cNvSpPr>
@@ -1914,18 +1704,13 @@
               <a:rPr kumimoji="1" lang="ja-JP" altLang="en-US"/>
               <a:t>マスター テキストの書式設定</a:t>
             </a:r>
-          </a:p>
-        </p:txBody>
-      </p:sp>
-      <p:sp>
-        <p:nvSpPr>
-          <p:cNvPr id="6" name="コンテンツ プレースホルダー 5">
-            <a:extLst>
-              <a:ext uri="{FF2B5EF4-FFF2-40B4-BE49-F238E27FC236}">
-                <a16:creationId xmlns:a16="http://schemas.microsoft.com/office/drawing/2014/main" id="{FBF06107-628B-45E5-EE73-CEDEE443F0C7}"/>
-              </a:ext>
-            </a:extLst>
-          </p:cNvPr>
+            <a:endParaRPr kumimoji="1" lang="ja-JP" altLang="en-US"/>
+          </a:p>
+        </p:txBody>
+      </p:sp>
+      <p:sp>
+        <p:nvSpPr>
+          <p:cNvPr id="6" name="コンテンツ プレースホルダー 5"/>
           <p:cNvSpPr>
             <a:spLocks noGrp="1"/>
           </p:cNvSpPr>
@@ -1948,6 +1733,7 @@
               <a:rPr kumimoji="1" lang="ja-JP" altLang="en-US"/>
               <a:t>マスター テキストの書式設定</a:t>
             </a:r>
+            <a:endParaRPr kumimoji="1" lang="ja-JP" altLang="en-US"/>
           </a:p>
           <a:p>
             <a:pPr lvl="1"/>
@@ -1963,6 +1749,7 @@
               <a:rPr kumimoji="1" lang="ja-JP" altLang="en-US"/>
               <a:t>レベル</a:t>
             </a:r>
+            <a:endParaRPr kumimoji="1" lang="ja-JP" altLang="en-US"/>
           </a:p>
           <a:p>
             <a:pPr lvl="2"/>
@@ -1978,6 +1765,7 @@
               <a:rPr kumimoji="1" lang="ja-JP" altLang="en-US"/>
               <a:t>レベル</a:t>
             </a:r>
+            <a:endParaRPr kumimoji="1" lang="ja-JP" altLang="en-US"/>
           </a:p>
           <a:p>
             <a:pPr lvl="3"/>
@@ -1993,6 +1781,7 @@
               <a:rPr kumimoji="1" lang="ja-JP" altLang="en-US"/>
               <a:t>レベル</a:t>
             </a:r>
+            <a:endParaRPr kumimoji="1" lang="ja-JP" altLang="en-US"/>
           </a:p>
           <a:p>
             <a:pPr lvl="4"/>
@@ -2008,18 +1797,13 @@
               <a:rPr kumimoji="1" lang="ja-JP" altLang="en-US"/>
               <a:t>レベル</a:t>
             </a:r>
-          </a:p>
-        </p:txBody>
-      </p:sp>
-      <p:sp>
-        <p:nvSpPr>
-          <p:cNvPr id="7" name="日付プレースホルダー 6">
-            <a:extLst>
-              <a:ext uri="{FF2B5EF4-FFF2-40B4-BE49-F238E27FC236}">
-                <a16:creationId xmlns:a16="http://schemas.microsoft.com/office/drawing/2014/main" id="{D14B864B-6480-138B-7326-270C02AB8481}"/>
-              </a:ext>
-            </a:extLst>
-          </p:cNvPr>
+            <a:endParaRPr kumimoji="1" lang="ja-JP" altLang="en-US"/>
+          </a:p>
+        </p:txBody>
+      </p:sp>
+      <p:sp>
+        <p:nvSpPr>
+          <p:cNvPr id="7" name="日付プレースホルダー 6"/>
           <p:cNvSpPr>
             <a:spLocks noGrp="1"/>
           </p:cNvSpPr>
@@ -2034,7 +1818,6 @@
           <a:p>
             <a:fld id="{ED21A4C6-E72E-43B8-B868-83DE5C82B262}" type="datetimeFigureOut">
               <a:rPr kumimoji="1" lang="ja-JP" altLang="en-US" smtClean="0"/>
-              <a:t>2026/7/22</a:t>
             </a:fld>
             <a:endParaRPr kumimoji="1" lang="ja-JP" altLang="en-US"/>
           </a:p>
@@ -2042,13 +1825,7 @@
       </p:sp>
       <p:sp>
         <p:nvSpPr>
-          <p:cNvPr id="8" name="フッター プレースホルダー 7">
-            <a:extLst>
-              <a:ext uri="{FF2B5EF4-FFF2-40B4-BE49-F238E27FC236}">
-                <a16:creationId xmlns:a16="http://schemas.microsoft.com/office/drawing/2014/main" id="{44FDA4E3-212F-1ADA-448F-5440EAA850DA}"/>
-              </a:ext>
-            </a:extLst>
-          </p:cNvPr>
+          <p:cNvPr id="8" name="フッター プレースホルダー 7"/>
           <p:cNvSpPr>
             <a:spLocks noGrp="1"/>
           </p:cNvSpPr>
@@ -2067,13 +1844,7 @@
       </p:sp>
       <p:sp>
         <p:nvSpPr>
-          <p:cNvPr id="9" name="スライド番号プレースホルダー 8">
-            <a:extLst>
-              <a:ext uri="{FF2B5EF4-FFF2-40B4-BE49-F238E27FC236}">
-                <a16:creationId xmlns:a16="http://schemas.microsoft.com/office/drawing/2014/main" id="{5454FEE8-2A6E-99D9-B47D-3FEC2739E808}"/>
-              </a:ext>
-            </a:extLst>
-          </p:cNvPr>
+          <p:cNvPr id="9" name="スライド番号プレースホルダー 8"/>
           <p:cNvSpPr>
             <a:spLocks noGrp="1"/>
           </p:cNvSpPr>
@@ -2088,18 +1859,12 @@
           <a:p>
             <a:fld id="{870758C8-7A29-49AC-A63D-B1FD04BD6167}" type="slidenum">
               <a:rPr kumimoji="1" lang="ja-JP" altLang="en-US" smtClean="0"/>
-              <a:t>‹#›</a:t>
             </a:fld>
             <a:endParaRPr kumimoji="1" lang="ja-JP" altLang="en-US"/>
           </a:p>
         </p:txBody>
       </p:sp>
     </p:spTree>
-    <p:extLst>
-      <p:ext uri="{BB962C8B-B14F-4D97-AF65-F5344CB8AC3E}">
-        <p14:creationId xmlns:p14="http://schemas.microsoft.com/office/powerpoint/2010/main" val="2915245649"/>
-      </p:ext>
-    </p:extLst>
   </p:cSld>
   <p:clrMapOvr>
     <a:masterClrMapping/>
@@ -2126,13 +1891,7 @@
       </p:grpSpPr>
       <p:sp>
         <p:nvSpPr>
-          <p:cNvPr id="2" name="タイトル 1">
-            <a:extLst>
-              <a:ext uri="{FF2B5EF4-FFF2-40B4-BE49-F238E27FC236}">
-                <a16:creationId xmlns:a16="http://schemas.microsoft.com/office/drawing/2014/main" id="{12D6042F-F2DA-D525-002B-A85E94145117}"/>
-              </a:ext>
-            </a:extLst>
-          </p:cNvPr>
+          <p:cNvPr id="2" name="タイトル 1"/>
           <p:cNvSpPr>
             <a:spLocks noGrp="1"/>
           </p:cNvSpPr>
@@ -2149,18 +1908,13 @@
               <a:rPr kumimoji="1" lang="ja-JP" altLang="en-US"/>
               <a:t>マスター タイトルの書式設定</a:t>
             </a:r>
-          </a:p>
-        </p:txBody>
-      </p:sp>
-      <p:sp>
-        <p:nvSpPr>
-          <p:cNvPr id="3" name="日付プレースホルダー 2">
-            <a:extLst>
-              <a:ext uri="{FF2B5EF4-FFF2-40B4-BE49-F238E27FC236}">
-                <a16:creationId xmlns:a16="http://schemas.microsoft.com/office/drawing/2014/main" id="{830E9626-F217-D512-4CA9-FC2D203317CE}"/>
-              </a:ext>
-            </a:extLst>
-          </p:cNvPr>
+            <a:endParaRPr kumimoji="1" lang="ja-JP" altLang="en-US"/>
+          </a:p>
+        </p:txBody>
+      </p:sp>
+      <p:sp>
+        <p:nvSpPr>
+          <p:cNvPr id="3" name="日付プレースホルダー 2"/>
           <p:cNvSpPr>
             <a:spLocks noGrp="1"/>
           </p:cNvSpPr>
@@ -2175,7 +1929,6 @@
           <a:p>
             <a:fld id="{ED21A4C6-E72E-43B8-B868-83DE5C82B262}" type="datetimeFigureOut">
               <a:rPr kumimoji="1" lang="ja-JP" altLang="en-US" smtClean="0"/>
-              <a:t>2026/7/22</a:t>
             </a:fld>
             <a:endParaRPr kumimoji="1" lang="ja-JP" altLang="en-US"/>
           </a:p>
@@ -2183,13 +1936,7 @@
       </p:sp>
       <p:sp>
         <p:nvSpPr>
-          <p:cNvPr id="4" name="フッター プレースホルダー 3">
-            <a:extLst>
-              <a:ext uri="{FF2B5EF4-FFF2-40B4-BE49-F238E27FC236}">
-                <a16:creationId xmlns:a16="http://schemas.microsoft.com/office/drawing/2014/main" id="{DE568B8A-A0D9-0B3F-F682-D51E0DD8B23D}"/>
-              </a:ext>
-            </a:extLst>
-          </p:cNvPr>
+          <p:cNvPr id="4" name="フッター プレースホルダー 3"/>
           <p:cNvSpPr>
             <a:spLocks noGrp="1"/>
           </p:cNvSpPr>
@@ -2208,13 +1955,7 @@
       </p:sp>
       <p:sp>
         <p:nvSpPr>
-          <p:cNvPr id="5" name="スライド番号プレースホルダー 4">
-            <a:extLst>
-              <a:ext uri="{FF2B5EF4-FFF2-40B4-BE49-F238E27FC236}">
-                <a16:creationId xmlns:a16="http://schemas.microsoft.com/office/drawing/2014/main" id="{558A9785-4173-C44B-4564-CB92F8D8DEE9}"/>
-              </a:ext>
-            </a:extLst>
-          </p:cNvPr>
+          <p:cNvPr id="5" name="スライド番号プレースホルダー 4"/>
           <p:cNvSpPr>
             <a:spLocks noGrp="1"/>
           </p:cNvSpPr>
@@ -2229,18 +1970,12 @@
           <a:p>
             <a:fld id="{870758C8-7A29-49AC-A63D-B1FD04BD6167}" type="slidenum">
               <a:rPr kumimoji="1" lang="ja-JP" altLang="en-US" smtClean="0"/>
-              <a:t>‹#›</a:t>
             </a:fld>
             <a:endParaRPr kumimoji="1" lang="ja-JP" altLang="en-US"/>
           </a:p>
         </p:txBody>
       </p:sp>
     </p:spTree>
-    <p:extLst>
-      <p:ext uri="{BB962C8B-B14F-4D97-AF65-F5344CB8AC3E}">
-        <p14:creationId xmlns:p14="http://schemas.microsoft.com/office/powerpoint/2010/main" val="424145705"/>
-      </p:ext>
-    </p:extLst>
   </p:cSld>
   <p:clrMapOvr>
     <a:masterClrMapping/>
@@ -2267,13 +2002,7 @@
       </p:grpSpPr>
       <p:sp>
         <p:nvSpPr>
-          <p:cNvPr id="2" name="日付プレースホルダー 1">
-            <a:extLst>
-              <a:ext uri="{FF2B5EF4-FFF2-40B4-BE49-F238E27FC236}">
-                <a16:creationId xmlns:a16="http://schemas.microsoft.com/office/drawing/2014/main" id="{3C4B8F56-2056-0C4E-17C4-75D5585BBFC3}"/>
-              </a:ext>
-            </a:extLst>
-          </p:cNvPr>
+          <p:cNvPr id="2" name="日付プレースホルダー 1"/>
           <p:cNvSpPr>
             <a:spLocks noGrp="1"/>
           </p:cNvSpPr>
@@ -2288,7 +2017,6 @@
           <a:p>
             <a:fld id="{ED21A4C6-E72E-43B8-B868-83DE5C82B262}" type="datetimeFigureOut">
               <a:rPr kumimoji="1" lang="ja-JP" altLang="en-US" smtClean="0"/>
-              <a:t>2026/7/22</a:t>
             </a:fld>
             <a:endParaRPr kumimoji="1" lang="ja-JP" altLang="en-US"/>
           </a:p>
@@ -2296,13 +2024,7 @@
       </p:sp>
       <p:sp>
         <p:nvSpPr>
-          <p:cNvPr id="3" name="フッター プレースホルダー 2">
-            <a:extLst>
-              <a:ext uri="{FF2B5EF4-FFF2-40B4-BE49-F238E27FC236}">
-                <a16:creationId xmlns:a16="http://schemas.microsoft.com/office/drawing/2014/main" id="{5EB261BA-D664-013C-6B57-A21A3A457E2E}"/>
-              </a:ext>
-            </a:extLst>
-          </p:cNvPr>
+          <p:cNvPr id="3" name="フッター プレースホルダー 2"/>
           <p:cNvSpPr>
             <a:spLocks noGrp="1"/>
           </p:cNvSpPr>
@@ -2321,13 +2043,7 @@
       </p:sp>
       <p:sp>
         <p:nvSpPr>
-          <p:cNvPr id="4" name="スライド番号プレースホルダー 3">
-            <a:extLst>
-              <a:ext uri="{FF2B5EF4-FFF2-40B4-BE49-F238E27FC236}">
-                <a16:creationId xmlns:a16="http://schemas.microsoft.com/office/drawing/2014/main" id="{AF103F78-467D-1A05-E2A7-CE620CAE3596}"/>
-              </a:ext>
-            </a:extLst>
-          </p:cNvPr>
+          <p:cNvPr id="4" name="スライド番号プレースホルダー 3"/>
           <p:cNvSpPr>
             <a:spLocks noGrp="1"/>
           </p:cNvSpPr>
@@ -2342,18 +2058,12 @@
           <a:p>
             <a:fld id="{870758C8-7A29-49AC-A63D-B1FD04BD6167}" type="slidenum">
               <a:rPr kumimoji="1" lang="ja-JP" altLang="en-US" smtClean="0"/>
-              <a:t>‹#›</a:t>
             </a:fld>
             <a:endParaRPr kumimoji="1" lang="ja-JP" altLang="en-US"/>
           </a:p>
         </p:txBody>
       </p:sp>
     </p:spTree>
-    <p:extLst>
-      <p:ext uri="{BB962C8B-B14F-4D97-AF65-F5344CB8AC3E}">
-        <p14:creationId xmlns:p14="http://schemas.microsoft.com/office/powerpoint/2010/main" val="4040772060"/>
-      </p:ext>
-    </p:extLst>
   </p:cSld>
   <p:clrMapOvr>
     <a:masterClrMapping/>
@@ -2380,13 +2090,7 @@
       </p:grpSpPr>
       <p:sp>
         <p:nvSpPr>
-          <p:cNvPr id="2" name="タイトル 1">
-            <a:extLst>
-              <a:ext uri="{FF2B5EF4-FFF2-40B4-BE49-F238E27FC236}">
-                <a16:creationId xmlns:a16="http://schemas.microsoft.com/office/drawing/2014/main" id="{98976B20-FD6D-CB6C-A13B-A2FF672E99E7}"/>
-              </a:ext>
-            </a:extLst>
-          </p:cNvPr>
+          <p:cNvPr id="2" name="タイトル 1"/>
           <p:cNvSpPr>
             <a:spLocks noGrp="1"/>
           </p:cNvSpPr>
@@ -2412,18 +2116,13 @@
               <a:rPr kumimoji="1" lang="ja-JP" altLang="en-US"/>
               <a:t>マスター タイトルの書式設定</a:t>
             </a:r>
-          </a:p>
-        </p:txBody>
-      </p:sp>
-      <p:sp>
-        <p:nvSpPr>
-          <p:cNvPr id="3" name="コンテンツ プレースホルダー 2">
-            <a:extLst>
-              <a:ext uri="{FF2B5EF4-FFF2-40B4-BE49-F238E27FC236}">
-                <a16:creationId xmlns:a16="http://schemas.microsoft.com/office/drawing/2014/main" id="{065C65DA-EE77-CB44-433D-AA2317828698}"/>
-              </a:ext>
-            </a:extLst>
-          </p:cNvPr>
+            <a:endParaRPr kumimoji="1" lang="ja-JP" altLang="en-US"/>
+          </a:p>
+        </p:txBody>
+      </p:sp>
+      <p:sp>
+        <p:nvSpPr>
+          <p:cNvPr id="3" name="コンテンツ プレースホルダー 2"/>
           <p:cNvSpPr>
             <a:spLocks noGrp="1"/>
           </p:cNvSpPr>
@@ -2474,6 +2173,7 @@
               <a:rPr kumimoji="1" lang="ja-JP" altLang="en-US"/>
               <a:t>マスター テキストの書式設定</a:t>
             </a:r>
+            <a:endParaRPr kumimoji="1" lang="ja-JP" altLang="en-US"/>
           </a:p>
           <a:p>
             <a:pPr lvl="1"/>
@@ -2489,6 +2189,7 @@
               <a:rPr kumimoji="1" lang="ja-JP" altLang="en-US"/>
               <a:t>レベル</a:t>
             </a:r>
+            <a:endParaRPr kumimoji="1" lang="ja-JP" altLang="en-US"/>
           </a:p>
           <a:p>
             <a:pPr lvl="2"/>
@@ -2504,6 +2205,7 @@
               <a:rPr kumimoji="1" lang="ja-JP" altLang="en-US"/>
               <a:t>レベル</a:t>
             </a:r>
+            <a:endParaRPr kumimoji="1" lang="ja-JP" altLang="en-US"/>
           </a:p>
           <a:p>
             <a:pPr lvl="3"/>
@@ -2519,6 +2221,7 @@
               <a:rPr kumimoji="1" lang="ja-JP" altLang="en-US"/>
               <a:t>レベル</a:t>
             </a:r>
+            <a:endParaRPr kumimoji="1" lang="ja-JP" altLang="en-US"/>
           </a:p>
           <a:p>
             <a:pPr lvl="4"/>
@@ -2534,18 +2237,13 @@
               <a:rPr kumimoji="1" lang="ja-JP" altLang="en-US"/>
               <a:t>レベル</a:t>
             </a:r>
-          </a:p>
-        </p:txBody>
-      </p:sp>
-      <p:sp>
-        <p:nvSpPr>
-          <p:cNvPr id="4" name="テキスト プレースホルダー 3">
-            <a:extLst>
-              <a:ext uri="{FF2B5EF4-FFF2-40B4-BE49-F238E27FC236}">
-                <a16:creationId xmlns:a16="http://schemas.microsoft.com/office/drawing/2014/main" id="{B405A450-1710-C5DA-75C0-2FF128C36C3D}"/>
-              </a:ext>
-            </a:extLst>
-          </p:cNvPr>
+            <a:endParaRPr kumimoji="1" lang="ja-JP" altLang="en-US"/>
+          </a:p>
+        </p:txBody>
+      </p:sp>
+      <p:sp>
+        <p:nvSpPr>
+          <p:cNvPr id="4" name="テキスト プレースホルダー 3"/>
           <p:cNvSpPr>
             <a:spLocks noGrp="1"/>
           </p:cNvSpPr>
@@ -2605,18 +2303,13 @@
               <a:rPr kumimoji="1" lang="ja-JP" altLang="en-US"/>
               <a:t>マスター テキストの書式設定</a:t>
             </a:r>
-          </a:p>
-        </p:txBody>
-      </p:sp>
-      <p:sp>
-        <p:nvSpPr>
-          <p:cNvPr id="5" name="日付プレースホルダー 4">
-            <a:extLst>
-              <a:ext uri="{FF2B5EF4-FFF2-40B4-BE49-F238E27FC236}">
-                <a16:creationId xmlns:a16="http://schemas.microsoft.com/office/drawing/2014/main" id="{93915079-AE59-BE4C-4E63-98AC31B41415}"/>
-              </a:ext>
-            </a:extLst>
-          </p:cNvPr>
+            <a:endParaRPr kumimoji="1" lang="ja-JP" altLang="en-US"/>
+          </a:p>
+        </p:txBody>
+      </p:sp>
+      <p:sp>
+        <p:nvSpPr>
+          <p:cNvPr id="5" name="日付プレースホルダー 4"/>
           <p:cNvSpPr>
             <a:spLocks noGrp="1"/>
           </p:cNvSpPr>
@@ -2631,7 +2324,6 @@
           <a:p>
             <a:fld id="{ED21A4C6-E72E-43B8-B868-83DE5C82B262}" type="datetimeFigureOut">
               <a:rPr kumimoji="1" lang="ja-JP" altLang="en-US" smtClean="0"/>
-              <a:t>2026/7/22</a:t>
             </a:fld>
             <a:endParaRPr kumimoji="1" lang="ja-JP" altLang="en-US"/>
           </a:p>
@@ -2639,13 +2331,7 @@
       </p:sp>
       <p:sp>
         <p:nvSpPr>
-          <p:cNvPr id="6" name="フッター プレースホルダー 5">
-            <a:extLst>
-              <a:ext uri="{FF2B5EF4-FFF2-40B4-BE49-F238E27FC236}">
-                <a16:creationId xmlns:a16="http://schemas.microsoft.com/office/drawing/2014/main" id="{3C4DF8CC-CF7E-F773-0E50-05048D7C5441}"/>
-              </a:ext>
-            </a:extLst>
-          </p:cNvPr>
+          <p:cNvPr id="6" name="フッター プレースホルダー 5"/>
           <p:cNvSpPr>
             <a:spLocks noGrp="1"/>
           </p:cNvSpPr>
@@ -2664,13 +2350,7 @@
       </p:sp>
       <p:sp>
         <p:nvSpPr>
-          <p:cNvPr id="7" name="スライド番号プレースホルダー 6">
-            <a:extLst>
-              <a:ext uri="{FF2B5EF4-FFF2-40B4-BE49-F238E27FC236}">
-                <a16:creationId xmlns:a16="http://schemas.microsoft.com/office/drawing/2014/main" id="{B432FB44-1CDC-38E1-B22E-428B2B5857CA}"/>
-              </a:ext>
-            </a:extLst>
-          </p:cNvPr>
+          <p:cNvPr id="7" name="スライド番号プレースホルダー 6"/>
           <p:cNvSpPr>
             <a:spLocks noGrp="1"/>
           </p:cNvSpPr>
@@ -2685,18 +2365,12 @@
           <a:p>
             <a:fld id="{870758C8-7A29-49AC-A63D-B1FD04BD6167}" type="slidenum">
               <a:rPr kumimoji="1" lang="ja-JP" altLang="en-US" smtClean="0"/>
-              <a:t>‹#›</a:t>
             </a:fld>
             <a:endParaRPr kumimoji="1" lang="ja-JP" altLang="en-US"/>
           </a:p>
         </p:txBody>
       </p:sp>
     </p:spTree>
-    <p:extLst>
-      <p:ext uri="{BB962C8B-B14F-4D97-AF65-F5344CB8AC3E}">
-        <p14:creationId xmlns:p14="http://schemas.microsoft.com/office/powerpoint/2010/main" val="3770547669"/>
-      </p:ext>
-    </p:extLst>
   </p:cSld>
   <p:clrMapOvr>
     <a:masterClrMapping/>
@@ -2723,13 +2397,7 @@
       </p:grpSpPr>
       <p:sp>
         <p:nvSpPr>
-          <p:cNvPr id="2" name="タイトル 1">
-            <a:extLst>
-              <a:ext uri="{FF2B5EF4-FFF2-40B4-BE49-F238E27FC236}">
-                <a16:creationId xmlns:a16="http://schemas.microsoft.com/office/drawing/2014/main" id="{3F6FCD40-D989-3683-5A50-D98C802EF9FB}"/>
-              </a:ext>
-            </a:extLst>
-          </p:cNvPr>
+          <p:cNvPr id="2" name="タイトル 1"/>
           <p:cNvSpPr>
             <a:spLocks noGrp="1"/>
           </p:cNvSpPr>
@@ -2755,18 +2423,13 @@
               <a:rPr kumimoji="1" lang="ja-JP" altLang="en-US"/>
               <a:t>マスター タイトルの書式設定</a:t>
             </a:r>
-          </a:p>
-        </p:txBody>
-      </p:sp>
-      <p:sp>
-        <p:nvSpPr>
-          <p:cNvPr id="3" name="図プレースホルダー 2">
-            <a:extLst>
-              <a:ext uri="{FF2B5EF4-FFF2-40B4-BE49-F238E27FC236}">
-                <a16:creationId xmlns:a16="http://schemas.microsoft.com/office/drawing/2014/main" id="{D2462DD2-395E-7D40-6882-B195DEE4ABDD}"/>
-              </a:ext>
-            </a:extLst>
-          </p:cNvPr>
+            <a:endParaRPr kumimoji="1" lang="ja-JP" altLang="en-US"/>
+          </a:p>
+        </p:txBody>
+      </p:sp>
+      <p:sp>
+        <p:nvSpPr>
+          <p:cNvPr id="3" name="図プレースホルダー 2"/>
           <p:cNvSpPr>
             <a:spLocks noGrp="1"/>
           </p:cNvSpPr>
@@ -2827,13 +2490,7 @@
       </p:sp>
       <p:sp>
         <p:nvSpPr>
-          <p:cNvPr id="4" name="テキスト プレースホルダー 3">
-            <a:extLst>
-              <a:ext uri="{FF2B5EF4-FFF2-40B4-BE49-F238E27FC236}">
-                <a16:creationId xmlns:a16="http://schemas.microsoft.com/office/drawing/2014/main" id="{BA0D5272-DE3C-A7B3-797E-62B4A895F08B}"/>
-              </a:ext>
-            </a:extLst>
-          </p:cNvPr>
+          <p:cNvPr id="4" name="テキスト プレースホルダー 3"/>
           <p:cNvSpPr>
             <a:spLocks noGrp="1"/>
           </p:cNvSpPr>
@@ -2893,18 +2550,13 @@
               <a:rPr kumimoji="1" lang="ja-JP" altLang="en-US"/>
               <a:t>マスター テキストの書式設定</a:t>
             </a:r>
-          </a:p>
-        </p:txBody>
-      </p:sp>
-      <p:sp>
-        <p:nvSpPr>
-          <p:cNvPr id="5" name="日付プレースホルダー 4">
-            <a:extLst>
-              <a:ext uri="{FF2B5EF4-FFF2-40B4-BE49-F238E27FC236}">
-                <a16:creationId xmlns:a16="http://schemas.microsoft.com/office/drawing/2014/main" id="{7E047B86-C030-6B5C-C33C-BAC9FC81991B}"/>
-              </a:ext>
-            </a:extLst>
-          </p:cNvPr>
+            <a:endParaRPr kumimoji="1" lang="ja-JP" altLang="en-US"/>
+          </a:p>
+        </p:txBody>
+      </p:sp>
+      <p:sp>
+        <p:nvSpPr>
+          <p:cNvPr id="5" name="日付プレースホルダー 4"/>
           <p:cNvSpPr>
             <a:spLocks noGrp="1"/>
           </p:cNvSpPr>
@@ -2919,7 +2571,6 @@
           <a:p>
             <a:fld id="{ED21A4C6-E72E-43B8-B868-83DE5C82B262}" type="datetimeFigureOut">
               <a:rPr kumimoji="1" lang="ja-JP" altLang="en-US" smtClean="0"/>
-              <a:t>2026/7/22</a:t>
             </a:fld>
             <a:endParaRPr kumimoji="1" lang="ja-JP" altLang="en-US"/>
           </a:p>
@@ -2927,13 +2578,7 @@
       </p:sp>
       <p:sp>
         <p:nvSpPr>
-          <p:cNvPr id="6" name="フッター プレースホルダー 5">
-            <a:extLst>
-              <a:ext uri="{FF2B5EF4-FFF2-40B4-BE49-F238E27FC236}">
-                <a16:creationId xmlns:a16="http://schemas.microsoft.com/office/drawing/2014/main" id="{6EA15F2C-C67E-3C1C-F90A-8032EF14BDD8}"/>
-              </a:ext>
-            </a:extLst>
-          </p:cNvPr>
+          <p:cNvPr id="6" name="フッター プレースホルダー 5"/>
           <p:cNvSpPr>
             <a:spLocks noGrp="1"/>
           </p:cNvSpPr>
@@ -2952,13 +2597,7 @@
       </p:sp>
       <p:sp>
         <p:nvSpPr>
-          <p:cNvPr id="7" name="スライド番号プレースホルダー 6">
-            <a:extLst>
-              <a:ext uri="{FF2B5EF4-FFF2-40B4-BE49-F238E27FC236}">
-                <a16:creationId xmlns:a16="http://schemas.microsoft.com/office/drawing/2014/main" id="{A9272648-EEA3-E882-1580-D8BDA22BBFA1}"/>
-              </a:ext>
-            </a:extLst>
-          </p:cNvPr>
+          <p:cNvPr id="7" name="スライド番号プレースホルダー 6"/>
           <p:cNvSpPr>
             <a:spLocks noGrp="1"/>
           </p:cNvSpPr>
@@ -2973,18 +2612,12 @@
           <a:p>
             <a:fld id="{870758C8-7A29-49AC-A63D-B1FD04BD6167}" type="slidenum">
               <a:rPr kumimoji="1" lang="ja-JP" altLang="en-US" smtClean="0"/>
-              <a:t>‹#›</a:t>
             </a:fld>
             <a:endParaRPr kumimoji="1" lang="ja-JP" altLang="en-US"/>
           </a:p>
         </p:txBody>
       </p:sp>
     </p:spTree>
-    <p:extLst>
-      <p:ext uri="{BB962C8B-B14F-4D97-AF65-F5344CB8AC3E}">
-        <p14:creationId xmlns:p14="http://schemas.microsoft.com/office/powerpoint/2010/main" val="823087887"/>
-      </p:ext>
-    </p:extLst>
   </p:cSld>
   <p:clrMapOvr>
     <a:masterClrMapping/>
@@ -3016,13 +2649,7 @@
       </p:grpSpPr>
       <p:sp>
         <p:nvSpPr>
-          <p:cNvPr id="2" name="タイトル プレースホルダー 1">
-            <a:extLst>
-              <a:ext uri="{FF2B5EF4-FFF2-40B4-BE49-F238E27FC236}">
-                <a16:creationId xmlns:a16="http://schemas.microsoft.com/office/drawing/2014/main" id="{CE4459B9-2F32-B56D-29D3-ADE274344ABC}"/>
-              </a:ext>
-            </a:extLst>
-          </p:cNvPr>
+          <p:cNvPr id="2" name="タイトル プレースホルダー 1"/>
           <p:cNvSpPr>
             <a:spLocks noGrp="1"/>
           </p:cNvSpPr>
@@ -3049,18 +2676,13 @@
               <a:rPr kumimoji="1" lang="ja-JP" altLang="en-US"/>
               <a:t>マスター タイトルの書式設定</a:t>
             </a:r>
-          </a:p>
-        </p:txBody>
-      </p:sp>
-      <p:sp>
-        <p:nvSpPr>
-          <p:cNvPr id="3" name="テキスト プレースホルダー 2">
-            <a:extLst>
-              <a:ext uri="{FF2B5EF4-FFF2-40B4-BE49-F238E27FC236}">
-                <a16:creationId xmlns:a16="http://schemas.microsoft.com/office/drawing/2014/main" id="{71FA87FB-6EAC-46EB-7879-D85C168F4524}"/>
-              </a:ext>
-            </a:extLst>
-          </p:cNvPr>
+            <a:endParaRPr kumimoji="1" lang="ja-JP" altLang="en-US"/>
+          </a:p>
+        </p:txBody>
+      </p:sp>
+      <p:sp>
+        <p:nvSpPr>
+          <p:cNvPr id="3" name="テキスト プレースホルダー 2"/>
           <p:cNvSpPr>
             <a:spLocks noGrp="1"/>
           </p:cNvSpPr>
@@ -3088,6 +2710,7 @@
               <a:rPr kumimoji="1" lang="ja-JP" altLang="en-US"/>
               <a:t>マスター テキストの書式設定</a:t>
             </a:r>
+            <a:endParaRPr kumimoji="1" lang="ja-JP" altLang="en-US"/>
           </a:p>
           <a:p>
             <a:pPr lvl="1"/>
@@ -3103,6 +2726,7 @@
               <a:rPr kumimoji="1" lang="ja-JP" altLang="en-US"/>
               <a:t>レベル</a:t>
             </a:r>
+            <a:endParaRPr kumimoji="1" lang="ja-JP" altLang="en-US"/>
           </a:p>
           <a:p>
             <a:pPr lvl="2"/>
@@ -3118,6 +2742,7 @@
               <a:rPr kumimoji="1" lang="ja-JP" altLang="en-US"/>
               <a:t>レベル</a:t>
             </a:r>
+            <a:endParaRPr kumimoji="1" lang="ja-JP" altLang="en-US"/>
           </a:p>
           <a:p>
             <a:pPr lvl="3"/>
@@ -3133,6 +2758,7 @@
               <a:rPr kumimoji="1" lang="ja-JP" altLang="en-US"/>
               <a:t>レベル</a:t>
             </a:r>
+            <a:endParaRPr kumimoji="1" lang="ja-JP" altLang="en-US"/>
           </a:p>
           <a:p>
             <a:pPr lvl="4"/>
@@ -3148,18 +2774,13 @@
               <a:rPr kumimoji="1" lang="ja-JP" altLang="en-US"/>
               <a:t>レベル</a:t>
             </a:r>
-          </a:p>
-        </p:txBody>
-      </p:sp>
-      <p:sp>
-        <p:nvSpPr>
-          <p:cNvPr id="4" name="日付プレースホルダー 3">
-            <a:extLst>
-              <a:ext uri="{FF2B5EF4-FFF2-40B4-BE49-F238E27FC236}">
-                <a16:creationId xmlns:a16="http://schemas.microsoft.com/office/drawing/2014/main" id="{D44ED085-0D04-47F1-1459-6CECD67A7AB6}"/>
-              </a:ext>
-            </a:extLst>
-          </p:cNvPr>
+            <a:endParaRPr kumimoji="1" lang="ja-JP" altLang="en-US"/>
+          </a:p>
+        </p:txBody>
+      </p:sp>
+      <p:sp>
+        <p:nvSpPr>
+          <p:cNvPr id="4" name="日付プレースホルダー 3"/>
           <p:cNvSpPr>
             <a:spLocks noGrp="1"/>
           </p:cNvSpPr>
@@ -3192,7 +2813,6 @@
           <a:p>
             <a:fld id="{ED21A4C6-E72E-43B8-B868-83DE5C82B262}" type="datetimeFigureOut">
               <a:rPr kumimoji="1" lang="ja-JP" altLang="en-US" smtClean="0"/>
-              <a:t>2026/7/22</a:t>
             </a:fld>
             <a:endParaRPr kumimoji="1" lang="ja-JP" altLang="en-US"/>
           </a:p>
@@ -3200,13 +2820,7 @@
       </p:sp>
       <p:sp>
         <p:nvSpPr>
-          <p:cNvPr id="5" name="フッター プレースホルダー 4">
-            <a:extLst>
-              <a:ext uri="{FF2B5EF4-FFF2-40B4-BE49-F238E27FC236}">
-                <a16:creationId xmlns:a16="http://schemas.microsoft.com/office/drawing/2014/main" id="{D23DB600-B009-07C6-B093-E085128C1D05}"/>
-              </a:ext>
-            </a:extLst>
-          </p:cNvPr>
+          <p:cNvPr id="5" name="フッター プレースホルダー 4"/>
           <p:cNvSpPr>
             <a:spLocks noGrp="1"/>
           </p:cNvSpPr>
@@ -3243,13 +2857,7 @@
       </p:sp>
       <p:sp>
         <p:nvSpPr>
-          <p:cNvPr id="6" name="スライド番号プレースホルダー 5">
-            <a:extLst>
-              <a:ext uri="{FF2B5EF4-FFF2-40B4-BE49-F238E27FC236}">
-                <a16:creationId xmlns:a16="http://schemas.microsoft.com/office/drawing/2014/main" id="{AB649B1E-536F-887B-E40C-09980DD5EE85}"/>
-              </a:ext>
-            </a:extLst>
-          </p:cNvPr>
+          <p:cNvPr id="6" name="スライド番号プレースホルダー 5"/>
           <p:cNvSpPr>
             <a:spLocks noGrp="1"/>
           </p:cNvSpPr>
@@ -3282,18 +2890,12 @@
           <a:p>
             <a:fld id="{870758C8-7A29-49AC-A63D-B1FD04BD6167}" type="slidenum">
               <a:rPr kumimoji="1" lang="ja-JP" altLang="en-US" smtClean="0"/>
-              <a:t>‹#›</a:t>
             </a:fld>
             <a:endParaRPr kumimoji="1" lang="ja-JP" altLang="en-US"/>
           </a:p>
         </p:txBody>
       </p:sp>
     </p:spTree>
-    <p:extLst>
-      <p:ext uri="{BB962C8B-B14F-4D97-AF65-F5344CB8AC3E}">
-        <p14:creationId xmlns:p14="http://schemas.microsoft.com/office/powerpoint/2010/main" val="1521720525"/>
-      </p:ext>
-    </p:extLst>
   </p:cSld>
   <p:clrMap bg1="lt1" tx1="dk1" bg2="lt2" tx2="dk2" accent1="accent1" accent2="accent2" accent3="accent3" accent4="accent4" accent5="accent5" accent6="accent6" hlink="hlink" folHlink="folHlink"/>
   <p:sldLayoutIdLst>
@@ -3595,21 +3197,6 @@
 <file path=ppt/slides/slide1.xml><?xml version="1.0" encoding="utf-8"?>
 <p:sld xmlns:a="http://schemas.openxmlformats.org/drawingml/2006/main" xmlns:r="http://schemas.openxmlformats.org/officeDocument/2006/relationships" xmlns:p="http://schemas.openxmlformats.org/presentationml/2006/main">
   <p:cSld>
-    <p:bg>
-      <p:bgPr>
-        <a:pattFill prst="lgGrid">
-          <a:fgClr>
-            <a:schemeClr val="bg1">
-              <a:lumMod val="85000"/>
-            </a:schemeClr>
-          </a:fgClr>
-          <a:bgClr>
-            <a:schemeClr val="bg1"/>
-          </a:bgClr>
-        </a:pattFill>
-        <a:effectLst/>
-      </p:bgPr>
-    </p:bg>
     <p:spTree>
       <p:nvGrpSpPr>
         <p:cNvPr id="1" name=""/>
@@ -3626,16 +3213,8 @@
       </p:grpSpPr>
       <p:cxnSp>
         <p:nvCxnSpPr>
-          <p:cNvPr id="3" name="直線コネクタ 2">
-            <a:extLst>
-              <a:ext uri="{FF2B5EF4-FFF2-40B4-BE49-F238E27FC236}">
-                <a16:creationId xmlns:a16="http://schemas.microsoft.com/office/drawing/2014/main" id="{5DC24858-B6DA-3594-99D9-171D897CE944}"/>
-              </a:ext>
-            </a:extLst>
-          </p:cNvPr>
-          <p:cNvCxnSpPr>
-            <a:cxnSpLocks/>
-          </p:cNvCxnSpPr>
+          <p:cNvPr id="3" name="直線コネクタ 2"/>
+          <p:cNvCxnSpPr/>
           <p:nvPr/>
         </p:nvCxnSpPr>
         <p:spPr>
@@ -3669,20 +3248,14 @@
       </p:cxnSp>
       <p:sp>
         <p:nvSpPr>
-          <p:cNvPr id="4" name="テキスト ボックス 3">
-            <a:extLst>
-              <a:ext uri="{FF2B5EF4-FFF2-40B4-BE49-F238E27FC236}">
-                <a16:creationId xmlns:a16="http://schemas.microsoft.com/office/drawing/2014/main" id="{53C81E2E-813F-643F-A4C6-2A801E7736F0}"/>
-              </a:ext>
-            </a:extLst>
-          </p:cNvPr>
+          <p:cNvPr id="4" name="テキスト ボックス 3"/>
           <p:cNvSpPr txBox="1"/>
           <p:nvPr/>
         </p:nvSpPr>
         <p:spPr>
           <a:xfrm>
             <a:off x="405635" y="284792"/>
-            <a:ext cx="1840568" cy="707886"/>
+            <a:ext cx="3013075" cy="706755"/>
           </a:xfrm>
           <a:prstGeom prst="rect">
             <a:avLst/>
@@ -3705,27 +3278,30 @@
                 <a:latin typeface="HGPｺﾞｼｯｸE" panose="020B0900000000000000" pitchFamily="50" charset="-128"/>
                 <a:ea typeface="HGPｺﾞｼｯｸE" panose="020B0900000000000000" pitchFamily="50" charset="-128"/>
               </a:rPr>
-              <a:t>タイトル</a:t>
-            </a:r>
-          </a:p>
-        </p:txBody>
-      </p:sp>
-      <p:sp>
-        <p:nvSpPr>
-          <p:cNvPr id="6" name="テキスト ボックス 5">
-            <a:extLst>
-              <a:ext uri="{FF2B5EF4-FFF2-40B4-BE49-F238E27FC236}">
-                <a16:creationId xmlns:a16="http://schemas.microsoft.com/office/drawing/2014/main" id="{1D032682-6069-7B2F-E5BA-AFFE2ACFFFB5}"/>
-              </a:ext>
-            </a:extLst>
-          </p:cNvPr>
+              <a:t>マップの概要</a:t>
+            </a:r>
+            <a:endParaRPr kumimoji="1" lang="ja-JP" altLang="en-US" sz="4000" dirty="0">
+              <a:solidFill>
+                <a:schemeClr val="accent3">
+                  <a:lumMod val="50000"/>
+                </a:schemeClr>
+              </a:solidFill>
+              <a:latin typeface="HGPｺﾞｼｯｸE" panose="020B0900000000000000" pitchFamily="50" charset="-128"/>
+              <a:ea typeface="HGPｺﾞｼｯｸE" panose="020B0900000000000000" pitchFamily="50" charset="-128"/>
+            </a:endParaRPr>
+          </a:p>
+        </p:txBody>
+      </p:sp>
+      <p:sp>
+        <p:nvSpPr>
+          <p:cNvPr id="6" name="テキスト ボックス 5"/>
           <p:cNvSpPr txBox="1"/>
           <p:nvPr/>
         </p:nvSpPr>
         <p:spPr>
           <a:xfrm>
-            <a:off x="5093961" y="6010275"/>
-            <a:ext cx="2004075" cy="461665"/>
+            <a:off x="386706" y="1519555"/>
+            <a:ext cx="3078480" cy="460375"/>
           </a:xfrm>
           <a:prstGeom prst="rect">
             <a:avLst/>
@@ -3743,78 +3319,851 @@
                 <a:latin typeface="BIZ UDPゴシック" panose="020B0400000000000000" pitchFamily="50" charset="-128"/>
                 <a:ea typeface="BIZ UDPゴシック" panose="020B0400000000000000" pitchFamily="50" charset="-128"/>
               </a:rPr>
-              <a:t>何らかの文字</a:t>
-            </a:r>
-          </a:p>
-        </p:txBody>
-      </p:sp>
-      <p:sp>
-        <p:nvSpPr>
-          <p:cNvPr id="7" name="正方形/長方形 6">
-            <a:extLst>
-              <a:ext uri="{FF2B5EF4-FFF2-40B4-BE49-F238E27FC236}">
-                <a16:creationId xmlns:a16="http://schemas.microsoft.com/office/drawing/2014/main" id="{D63F4DBE-4D2A-98BA-F20C-F4A58884764D}"/>
-              </a:ext>
-            </a:extLst>
-          </p:cNvPr>
-          <p:cNvSpPr/>
+              <a:t>マップは以下の</a:t>
+            </a:r>
+            <a:r>
+              <a:rPr kumimoji="1" lang="en-US" altLang="ja-JP" sz="2400" dirty="0">
+                <a:latin typeface="BIZ UDPゴシック" panose="020B0400000000000000" pitchFamily="50" charset="-128"/>
+                <a:ea typeface="BIZ UDPゴシック" panose="020B0400000000000000" pitchFamily="50" charset="-128"/>
+              </a:rPr>
+              <a:t>2</a:t>
+            </a:r>
+            <a:r>
+              <a:rPr kumimoji="1" lang="ja-JP" altLang="en-US" sz="2400" dirty="0">
+                <a:latin typeface="BIZ UDPゴシック" panose="020B0400000000000000" pitchFamily="50" charset="-128"/>
+                <a:ea typeface="BIZ UDPゴシック" panose="020B0400000000000000" pitchFamily="50" charset="-128"/>
+              </a:rPr>
+              <a:t>種類</a:t>
+            </a:r>
+            <a:endParaRPr kumimoji="1" lang="ja-JP" altLang="en-US" sz="2400" dirty="0">
+              <a:latin typeface="BIZ UDPゴシック" panose="020B0400000000000000" pitchFamily="50" charset="-128"/>
+              <a:ea typeface="BIZ UDPゴシック" panose="020B0400000000000000" pitchFamily="50" charset="-128"/>
+            </a:endParaRPr>
+          </a:p>
+        </p:txBody>
+      </p:sp>
+      <p:pic>
+        <p:nvPicPr>
+          <p:cNvPr id="2" name="図形 1"/>
+          <p:cNvPicPr>
+            <a:picLocks noChangeAspect="1"/>
+          </p:cNvPicPr>
           <p:nvPr/>
-        </p:nvSpPr>
+        </p:nvPicPr>
+        <p:blipFill>
+          <a:blip r:embed="rId1"/>
+          <a:stretch>
+            <a:fillRect/>
+          </a:stretch>
+        </p:blipFill>
         <p:spPr>
           <a:xfrm>
-            <a:off x="2320309" y="1914525"/>
-            <a:ext cx="7551381" cy="2400300"/>
+            <a:off x="312420" y="2322195"/>
+            <a:ext cx="5685155" cy="3688080"/>
           </a:xfrm>
           <a:prstGeom prst="rect">
             <a:avLst/>
           </a:prstGeom>
-          <a:solidFill>
-            <a:schemeClr val="bg1"/>
-          </a:solidFill>
-          <a:ln>
+        </p:spPr>
+      </p:pic>
+      <p:pic>
+        <p:nvPicPr>
+          <p:cNvPr id="5" name="図形 4"/>
+          <p:cNvPicPr>
+            <a:picLocks noChangeAspect="1"/>
+          </p:cNvPicPr>
+          <p:nvPr/>
+        </p:nvPicPr>
+        <p:blipFill>
+          <a:blip r:embed="rId2"/>
+          <a:stretch>
+            <a:fillRect/>
+          </a:stretch>
+        </p:blipFill>
+        <p:spPr>
+          <a:xfrm>
+            <a:off x="6117590" y="2322195"/>
+            <a:ext cx="5718810" cy="3688080"/>
+          </a:xfrm>
+          <a:prstGeom prst="rect">
+            <a:avLst/>
+          </a:prstGeom>
+        </p:spPr>
+      </p:pic>
+      <p:sp>
+        <p:nvSpPr>
+          <p:cNvPr id="8" name="テキストボックス 7"/>
+          <p:cNvSpPr txBox="1"/>
+          <p:nvPr/>
+        </p:nvSpPr>
+        <p:spPr>
+          <a:xfrm>
+            <a:off x="1917065" y="6162040"/>
+            <a:ext cx="2735580" cy="587375"/>
+          </a:xfrm>
+          <a:prstGeom prst="rect">
+            <a:avLst/>
+          </a:prstGeom>
+          <a:noFill/>
+        </p:spPr>
+        <p:txBody>
+          <a:bodyPr wrap="square" rtlCol="0">
+            <a:noAutofit/>
+          </a:bodyPr>
+          <a:p>
+            <a:r>
+              <a:rPr lang="ja-JP" altLang="en-US" sz="2400"/>
+              <a:t>難易度：</a:t>
+            </a:r>
+            <a:r>
+              <a:rPr lang="en-US" altLang="ja-JP" sz="2400"/>
+              <a:t>NORMAL</a:t>
+            </a:r>
+            <a:endParaRPr lang="en-US" altLang="ja-JP" sz="2400"/>
+          </a:p>
+        </p:txBody>
+      </p:sp>
+      <p:sp>
+        <p:nvSpPr>
+          <p:cNvPr id="9" name="テキストボックス 8"/>
+          <p:cNvSpPr txBox="1"/>
+          <p:nvPr/>
+        </p:nvSpPr>
+        <p:spPr>
+          <a:xfrm>
+            <a:off x="7937500" y="6162040"/>
+            <a:ext cx="2662555" cy="460375"/>
+          </a:xfrm>
+          <a:prstGeom prst="rect">
+            <a:avLst/>
+          </a:prstGeom>
+          <a:noFill/>
+        </p:spPr>
+        <p:txBody>
+          <a:bodyPr wrap="square" rtlCol="0">
+            <a:spAutoFit/>
+          </a:bodyPr>
+          <a:p>
+            <a:r>
+              <a:rPr lang="ja-JP" altLang="en-US" sz="2400"/>
+              <a:t>難易度：</a:t>
+            </a:r>
+            <a:r>
+              <a:rPr lang="en-US" altLang="ja-JP" sz="2400"/>
+              <a:t>HARD</a:t>
+            </a:r>
+            <a:endParaRPr lang="en-US" altLang="ja-JP" sz="2400"/>
+          </a:p>
+        </p:txBody>
+      </p:sp>
+    </p:spTree>
+  </p:cSld>
+  <p:clrMapOvr>
+    <a:masterClrMapping/>
+  </p:clrMapOvr>
+</p:sld>
+</file>
+
+<file path=ppt/slides/slide2.xml><?xml version="1.0" encoding="utf-8"?>
+<p:sld xmlns:a="http://schemas.openxmlformats.org/drawingml/2006/main" xmlns:r="http://schemas.openxmlformats.org/officeDocument/2006/relationships" xmlns:p="http://schemas.openxmlformats.org/presentationml/2006/main">
+  <p:cSld>
+    <p:spTree>
+      <p:nvGrpSpPr>
+        <p:cNvPr id="1" name=""/>
+        <p:cNvGrpSpPr/>
+        <p:nvPr/>
+      </p:nvGrpSpPr>
+      <p:grpSpPr>
+        <a:xfrm>
+          <a:off x="0" y="0"/>
+          <a:ext cx="0" cy="0"/>
+          <a:chOff x="0" y="0"/>
+          <a:chExt cx="0" cy="0"/>
+        </a:xfrm>
+      </p:grpSpPr>
+      <p:cxnSp>
+        <p:nvCxnSpPr>
+          <p:cNvPr id="3" name="直線コネクタ 2"/>
+          <p:cNvCxnSpPr/>
+          <p:nvPr/>
+        </p:nvCxnSpPr>
+        <p:spPr>
+          <a:xfrm>
+            <a:off x="386585" y="1089791"/>
+            <a:ext cx="2898271" cy="0"/>
+          </a:xfrm>
+          <a:prstGeom prst="line">
+            <a:avLst/>
+          </a:prstGeom>
+          <a:ln w="107950">
             <a:solidFill>
-              <a:schemeClr val="tx1"/>
+              <a:srgbClr val="0C807E"/>
             </a:solidFill>
           </a:ln>
         </p:spPr>
         <p:style>
-          <a:lnRef idx="2">
-            <a:schemeClr val="accent1">
-              <a:shade val="15000"/>
-            </a:schemeClr>
+          <a:lnRef idx="1">
+            <a:schemeClr val="accent1"/>
           </a:lnRef>
-          <a:fillRef idx="1">
+          <a:fillRef idx="0">
             <a:schemeClr val="accent1"/>
           </a:fillRef>
           <a:effectRef idx="0">
             <a:schemeClr val="accent1"/>
           </a:effectRef>
           <a:fontRef idx="minor">
-            <a:schemeClr val="lt1"/>
+            <a:schemeClr val="tx1"/>
           </a:fontRef>
         </p:style>
-        <p:txBody>
-          <a:bodyPr rtlCol="0" anchor="ctr"/>
-          <a:lstStyle/>
-          <a:p>
-            <a:pPr algn="ctr"/>
-            <a:r>
-              <a:rPr kumimoji="1" lang="ja-JP" altLang="en-US" dirty="0">
+      </p:cxnSp>
+      <p:sp>
+        <p:nvSpPr>
+          <p:cNvPr id="4" name="テキスト ボックス 3"/>
+          <p:cNvSpPr txBox="1"/>
+          <p:nvPr/>
+        </p:nvSpPr>
+        <p:spPr>
+          <a:xfrm>
+            <a:off x="405635" y="284792"/>
+            <a:ext cx="3013075" cy="706755"/>
+          </a:xfrm>
+          <a:prstGeom prst="rect">
+            <a:avLst/>
+          </a:prstGeom>
+          <a:noFill/>
+        </p:spPr>
+        <p:txBody>
+          <a:bodyPr wrap="none" rtlCol="0">
+            <a:spAutoFit/>
+          </a:bodyPr>
+          <a:lstStyle/>
+          <a:p>
+            <a:r>
+              <a:rPr kumimoji="1" lang="ja-JP" altLang="en-US" sz="4000" dirty="0">
                 <a:solidFill>
-                  <a:sysClr val="windowText" lastClr="000000"/>
+                  <a:schemeClr val="accent3">
+                    <a:lumMod val="50000"/>
+                  </a:schemeClr>
                 </a:solidFill>
+                <a:latin typeface="HGPｺﾞｼｯｸE" panose="020B0900000000000000" pitchFamily="50" charset="-128"/>
+                <a:ea typeface="HGPｺﾞｼｯｸE" panose="020B0900000000000000" pitchFamily="50" charset="-128"/>
               </a:rPr>
-              <a:t>画面の写真とか</a:t>
-            </a:r>
-          </a:p>
-        </p:txBody>
-      </p:sp>
+              <a:t>マップの概要</a:t>
+            </a:r>
+            <a:endParaRPr kumimoji="1" lang="ja-JP" altLang="en-US" sz="4000" dirty="0">
+              <a:solidFill>
+                <a:schemeClr val="accent3">
+                  <a:lumMod val="50000"/>
+                </a:schemeClr>
+              </a:solidFill>
+              <a:latin typeface="HGPｺﾞｼｯｸE" panose="020B0900000000000000" pitchFamily="50" charset="-128"/>
+              <a:ea typeface="HGPｺﾞｼｯｸE" panose="020B0900000000000000" pitchFamily="50" charset="-128"/>
+            </a:endParaRPr>
+          </a:p>
+        </p:txBody>
+      </p:sp>
+      <p:pic>
+        <p:nvPicPr>
+          <p:cNvPr id="2" name="図形 1"/>
+          <p:cNvPicPr>
+            <a:picLocks noChangeAspect="1"/>
+          </p:cNvPicPr>
+          <p:nvPr/>
+        </p:nvPicPr>
+        <p:blipFill>
+          <a:blip r:embed="rId1"/>
+          <a:stretch>
+            <a:fillRect/>
+          </a:stretch>
+        </p:blipFill>
+        <p:spPr>
+          <a:xfrm>
+            <a:off x="312420" y="1985010"/>
+            <a:ext cx="6094730" cy="3954145"/>
+          </a:xfrm>
+          <a:prstGeom prst="rect">
+            <a:avLst/>
+          </a:prstGeom>
+        </p:spPr>
+      </p:pic>
+      <p:sp>
+        <p:nvSpPr>
+          <p:cNvPr id="8" name="テキストボックス 7"/>
+          <p:cNvSpPr txBox="1"/>
+          <p:nvPr/>
+        </p:nvSpPr>
+        <p:spPr>
+          <a:xfrm>
+            <a:off x="405765" y="1325245"/>
+            <a:ext cx="2735580" cy="587375"/>
+          </a:xfrm>
+          <a:prstGeom prst="rect">
+            <a:avLst/>
+          </a:prstGeom>
+          <a:noFill/>
+        </p:spPr>
+        <p:txBody>
+          <a:bodyPr wrap="square" rtlCol="0">
+            <a:noAutofit/>
+          </a:bodyPr>
+          <a:p>
+            <a:r>
+              <a:rPr lang="ja-JP" altLang="en-US" sz="2400"/>
+              <a:t>難易度：</a:t>
+            </a:r>
+            <a:r>
+              <a:rPr lang="en-US" altLang="ja-JP" sz="2400"/>
+              <a:t>NORMAL</a:t>
+            </a:r>
+            <a:endParaRPr lang="en-US" altLang="ja-JP" sz="2400"/>
+          </a:p>
+        </p:txBody>
+      </p:sp>
+      <p:sp>
+        <p:nvSpPr>
+          <p:cNvPr id="7" name="テキストボックス 6"/>
+          <p:cNvSpPr txBox="1"/>
+          <p:nvPr/>
+        </p:nvSpPr>
+        <p:spPr>
+          <a:xfrm>
+            <a:off x="6858000" y="1406525"/>
+            <a:ext cx="4893310" cy="4892675"/>
+          </a:xfrm>
+          <a:prstGeom prst="rect">
+            <a:avLst/>
+          </a:prstGeom>
+          <a:noFill/>
+        </p:spPr>
+        <p:txBody>
+          <a:bodyPr wrap="square" rtlCol="0">
+            <a:spAutoFit/>
+          </a:bodyPr>
+          <a:p>
+            <a:r>
+              <a:rPr lang="ja-JP" altLang="en-US" sz="2400"/>
+              <a:t>・マグマ（赤丸）</a:t>
+            </a:r>
+            <a:endParaRPr lang="ja-JP" altLang="en-US" sz="2400"/>
+          </a:p>
+          <a:p>
+            <a:r>
+              <a:rPr lang="ja-JP" altLang="en-US" sz="2400"/>
+              <a:t>　危険地帯。乗っている間は</a:t>
+            </a:r>
+            <a:r>
+              <a:rPr lang="en-US" altLang="ja-JP" sz="2400"/>
+              <a:t>HP</a:t>
+            </a:r>
+            <a:r>
+              <a:rPr lang="ja-JP" altLang="en-US" sz="2400"/>
+              <a:t>とスコアが減り続ける。</a:t>
+            </a:r>
+            <a:endParaRPr lang="ja-JP" altLang="en-US" sz="2400"/>
+          </a:p>
+          <a:p>
+            <a:endParaRPr lang="ja-JP" altLang="en-US" sz="2400"/>
+          </a:p>
+          <a:p>
+            <a:r>
+              <a:rPr lang="ja-JP" altLang="en-US" sz="2400"/>
+              <a:t>・氷の床（</a:t>
+            </a:r>
+            <a:r>
+              <a:rPr lang="ja-JP" altLang="en-US" sz="2400"/>
+              <a:t>水色丸）</a:t>
+            </a:r>
+            <a:endParaRPr lang="ja-JP" altLang="en-US" sz="2400"/>
+          </a:p>
+          <a:p>
+            <a:r>
+              <a:rPr lang="ja-JP" altLang="en-US" sz="2400"/>
+              <a:t>　滑る床。乗ると移動速度が上昇し、逃げ足が速くなる。</a:t>
+            </a:r>
+            <a:endParaRPr lang="ja-JP" altLang="en-US" sz="2400"/>
+          </a:p>
+          <a:p>
+            <a:endParaRPr lang="ja-JP" altLang="en-US" sz="2400"/>
+          </a:p>
+          <a:p>
+            <a:r>
+              <a:rPr lang="ja-JP" altLang="en-US" sz="2400"/>
+              <a:t>・無敵ゾーン（白四角）</a:t>
+            </a:r>
+            <a:endParaRPr lang="ja-JP" altLang="en-US" sz="2400"/>
+          </a:p>
+          <a:p>
+            <a:r>
+              <a:rPr lang="ja-JP" altLang="en-US" sz="2400"/>
+              <a:t>　お助けエリア。触れると一定時間、敵やマグマのダメージを無効化</a:t>
+            </a:r>
+            <a:endParaRPr lang="ja-JP" altLang="en-US" sz="2400"/>
+          </a:p>
+          <a:p>
+            <a:endParaRPr lang="ja-JP" altLang="en-US" sz="2400"/>
+          </a:p>
+        </p:txBody>
+      </p:sp>
+      <p:cxnSp>
+        <p:nvCxnSpPr>
+          <p:cNvPr id="15" name="直線矢印コネクタ 14"/>
+          <p:cNvCxnSpPr/>
+          <p:nvPr/>
+        </p:nvCxnSpPr>
+        <p:spPr>
+          <a:xfrm flipH="1">
+            <a:off x="4841875" y="3075305"/>
+            <a:ext cx="2149475" cy="726440"/>
+          </a:xfrm>
+          <a:prstGeom prst="straightConnector1">
+            <a:avLst/>
+          </a:prstGeom>
+          <a:ln>
+            <a:solidFill>
+              <a:schemeClr val="accent1">
+                <a:lumMod val="20000"/>
+                <a:lumOff val="80000"/>
+              </a:schemeClr>
+            </a:solidFill>
+            <a:tailEnd type="arrow"/>
+          </a:ln>
+        </p:spPr>
+        <p:style>
+          <a:lnRef idx="2">
+            <a:schemeClr val="accent1"/>
+          </a:lnRef>
+          <a:fillRef idx="0">
+            <a:schemeClr val="accent1"/>
+          </a:fillRef>
+          <a:effectRef idx="1">
+            <a:schemeClr val="accent1"/>
+          </a:effectRef>
+          <a:fontRef idx="minor">
+            <a:schemeClr val="tx1"/>
+          </a:fontRef>
+        </p:style>
+      </p:cxnSp>
+      <p:cxnSp>
+        <p:nvCxnSpPr>
+          <p:cNvPr id="16" name="直線矢印コネクタ 15"/>
+          <p:cNvCxnSpPr/>
+          <p:nvPr/>
+        </p:nvCxnSpPr>
+        <p:spPr>
+          <a:xfrm flipH="1">
+            <a:off x="4688205" y="1600835"/>
+            <a:ext cx="2292985" cy="1320800"/>
+          </a:xfrm>
+          <a:prstGeom prst="straightConnector1">
+            <a:avLst/>
+          </a:prstGeom>
+          <a:ln>
+            <a:solidFill>
+              <a:srgbClr val="FF0000"/>
+            </a:solidFill>
+            <a:tailEnd type="arrow"/>
+          </a:ln>
+        </p:spPr>
+        <p:style>
+          <a:lnRef idx="2">
+            <a:schemeClr val="accent1"/>
+          </a:lnRef>
+          <a:fillRef idx="0">
+            <a:schemeClr val="accent1"/>
+          </a:fillRef>
+          <a:effectRef idx="1">
+            <a:schemeClr val="accent1"/>
+          </a:effectRef>
+          <a:fontRef idx="minor">
+            <a:schemeClr val="tx1"/>
+          </a:fontRef>
+        </p:style>
+      </p:cxnSp>
+      <p:cxnSp>
+        <p:nvCxnSpPr>
+          <p:cNvPr id="17" name="直線矢印コネクタ 16"/>
+          <p:cNvCxnSpPr/>
+          <p:nvPr/>
+        </p:nvCxnSpPr>
+        <p:spPr>
+          <a:xfrm flipH="1">
+            <a:off x="5281930" y="4528820"/>
+            <a:ext cx="1709420" cy="972185"/>
+          </a:xfrm>
+          <a:prstGeom prst="straightConnector1">
+            <a:avLst/>
+          </a:prstGeom>
+          <a:ln>
+            <a:solidFill>
+              <a:schemeClr val="tx1"/>
+            </a:solidFill>
+            <a:tailEnd type="arrow"/>
+          </a:ln>
+        </p:spPr>
+        <p:style>
+          <a:lnRef idx="2">
+            <a:schemeClr val="accent1"/>
+          </a:lnRef>
+          <a:fillRef idx="0">
+            <a:schemeClr val="accent1"/>
+          </a:fillRef>
+          <a:effectRef idx="1">
+            <a:schemeClr val="accent1"/>
+          </a:effectRef>
+          <a:fontRef idx="minor">
+            <a:schemeClr val="tx1"/>
+          </a:fontRef>
+        </p:style>
+      </p:cxnSp>
     </p:spTree>
-    <p:extLst>
-      <p:ext uri="{BB962C8B-B14F-4D97-AF65-F5344CB8AC3E}">
-        <p14:creationId xmlns:p14="http://schemas.microsoft.com/office/powerpoint/2010/main" val="3106124702"/>
-      </p:ext>
-    </p:extLst>
+  </p:cSld>
+  <p:clrMapOvr>
+    <a:masterClrMapping/>
+  </p:clrMapOvr>
+</p:sld>
+</file>
+
+<file path=ppt/slides/slide3.xml><?xml version="1.0" encoding="utf-8"?>
+<p:sld xmlns:a="http://schemas.openxmlformats.org/drawingml/2006/main" xmlns:r="http://schemas.openxmlformats.org/officeDocument/2006/relationships" xmlns:p="http://schemas.openxmlformats.org/presentationml/2006/main">
+  <p:cSld>
+    <p:spTree>
+      <p:nvGrpSpPr>
+        <p:cNvPr id="1" name=""/>
+        <p:cNvGrpSpPr/>
+        <p:nvPr/>
+      </p:nvGrpSpPr>
+      <p:grpSpPr>
+        <a:xfrm>
+          <a:off x="0" y="0"/>
+          <a:ext cx="0" cy="0"/>
+          <a:chOff x="0" y="0"/>
+          <a:chExt cx="0" cy="0"/>
+        </a:xfrm>
+      </p:grpSpPr>
+      <p:cxnSp>
+        <p:nvCxnSpPr>
+          <p:cNvPr id="3" name="直線コネクタ 2"/>
+          <p:cNvCxnSpPr/>
+          <p:nvPr/>
+        </p:nvCxnSpPr>
+        <p:spPr>
+          <a:xfrm>
+            <a:off x="386585" y="1089791"/>
+            <a:ext cx="2898271" cy="0"/>
+          </a:xfrm>
+          <a:prstGeom prst="line">
+            <a:avLst/>
+          </a:prstGeom>
+          <a:ln w="107950">
+            <a:solidFill>
+              <a:srgbClr val="0C807E"/>
+            </a:solidFill>
+          </a:ln>
+        </p:spPr>
+        <p:style>
+          <a:lnRef idx="1">
+            <a:schemeClr val="accent1"/>
+          </a:lnRef>
+          <a:fillRef idx="0">
+            <a:schemeClr val="accent1"/>
+          </a:fillRef>
+          <a:effectRef idx="0">
+            <a:schemeClr val="accent1"/>
+          </a:effectRef>
+          <a:fontRef idx="minor">
+            <a:schemeClr val="tx1"/>
+          </a:fontRef>
+        </p:style>
+      </p:cxnSp>
+      <p:sp>
+        <p:nvSpPr>
+          <p:cNvPr id="4" name="テキスト ボックス 3"/>
+          <p:cNvSpPr txBox="1"/>
+          <p:nvPr/>
+        </p:nvSpPr>
+        <p:spPr>
+          <a:xfrm>
+            <a:off x="405635" y="284792"/>
+            <a:ext cx="3013075" cy="706755"/>
+          </a:xfrm>
+          <a:prstGeom prst="rect">
+            <a:avLst/>
+          </a:prstGeom>
+          <a:noFill/>
+        </p:spPr>
+        <p:txBody>
+          <a:bodyPr wrap="none" rtlCol="0">
+            <a:spAutoFit/>
+          </a:bodyPr>
+          <a:lstStyle/>
+          <a:p>
+            <a:r>
+              <a:rPr kumimoji="1" lang="ja-JP" altLang="en-US" sz="4000" dirty="0">
+                <a:solidFill>
+                  <a:schemeClr val="accent3">
+                    <a:lumMod val="50000"/>
+                  </a:schemeClr>
+                </a:solidFill>
+                <a:latin typeface="HGPｺﾞｼｯｸE" panose="020B0900000000000000" pitchFamily="50" charset="-128"/>
+                <a:ea typeface="HGPｺﾞｼｯｸE" panose="020B0900000000000000" pitchFamily="50" charset="-128"/>
+              </a:rPr>
+              <a:t>マップの概要</a:t>
+            </a:r>
+            <a:endParaRPr kumimoji="1" lang="ja-JP" altLang="en-US" sz="4000" dirty="0">
+              <a:solidFill>
+                <a:schemeClr val="accent3">
+                  <a:lumMod val="50000"/>
+                </a:schemeClr>
+              </a:solidFill>
+              <a:latin typeface="HGPｺﾞｼｯｸE" panose="020B0900000000000000" pitchFamily="50" charset="-128"/>
+              <a:ea typeface="HGPｺﾞｼｯｸE" panose="020B0900000000000000" pitchFamily="50" charset="-128"/>
+            </a:endParaRPr>
+          </a:p>
+        </p:txBody>
+      </p:sp>
+      <p:pic>
+        <p:nvPicPr>
+          <p:cNvPr id="5" name="図形 4"/>
+          <p:cNvPicPr>
+            <a:picLocks noChangeAspect="1"/>
+          </p:cNvPicPr>
+          <p:nvPr/>
+        </p:nvPicPr>
+        <p:blipFill>
+          <a:blip r:embed="rId1"/>
+          <a:stretch>
+            <a:fillRect/>
+          </a:stretch>
+        </p:blipFill>
+        <p:spPr>
+          <a:xfrm>
+            <a:off x="302895" y="2179320"/>
+            <a:ext cx="5718810" cy="3688080"/>
+          </a:xfrm>
+          <a:prstGeom prst="rect">
+            <a:avLst/>
+          </a:prstGeom>
+        </p:spPr>
+      </p:pic>
+      <p:sp>
+        <p:nvSpPr>
+          <p:cNvPr id="9" name="テキストボックス 8"/>
+          <p:cNvSpPr txBox="1"/>
+          <p:nvPr/>
+        </p:nvSpPr>
+        <p:spPr>
+          <a:xfrm>
+            <a:off x="504190" y="1404620"/>
+            <a:ext cx="2662555" cy="460375"/>
+          </a:xfrm>
+          <a:prstGeom prst="rect">
+            <a:avLst/>
+          </a:prstGeom>
+          <a:noFill/>
+        </p:spPr>
+        <p:txBody>
+          <a:bodyPr wrap="square" rtlCol="0">
+            <a:spAutoFit/>
+          </a:bodyPr>
+          <a:p>
+            <a:r>
+              <a:rPr lang="ja-JP" altLang="en-US" sz="2400"/>
+              <a:t>難易度：</a:t>
+            </a:r>
+            <a:r>
+              <a:rPr lang="en-US" altLang="ja-JP" sz="2400"/>
+              <a:t>HARD</a:t>
+            </a:r>
+            <a:endParaRPr lang="en-US" altLang="ja-JP" sz="2400"/>
+          </a:p>
+        </p:txBody>
+      </p:sp>
+      <p:sp>
+        <p:nvSpPr>
+          <p:cNvPr id="7" name="テキストボックス 6"/>
+          <p:cNvSpPr txBox="1"/>
+          <p:nvPr/>
+        </p:nvSpPr>
+        <p:spPr>
+          <a:xfrm>
+            <a:off x="6623050" y="1324610"/>
+            <a:ext cx="4841875" cy="4892675"/>
+          </a:xfrm>
+          <a:prstGeom prst="rect">
+            <a:avLst/>
+          </a:prstGeom>
+          <a:noFill/>
+        </p:spPr>
+        <p:txBody>
+          <a:bodyPr wrap="square" rtlCol="0">
+            <a:spAutoFit/>
+          </a:bodyPr>
+          <a:p>
+            <a:r>
+              <a:rPr lang="ja-JP" altLang="en-US" sz="2400"/>
+              <a:t>・蜘蛛の巣</a:t>
+            </a:r>
+            <a:endParaRPr lang="ja-JP" altLang="en-US" sz="2400"/>
+          </a:p>
+          <a:p>
+            <a:r>
+              <a:rPr lang="ja-JP" altLang="en-US" sz="2400"/>
+              <a:t>　捕まると完全に足止め。「方向キー ＋ スペースキー4回連打」で脱出！</a:t>
+            </a:r>
+            <a:endParaRPr lang="ja-JP" altLang="en-US" sz="2400"/>
+          </a:p>
+          <a:p>
+            <a:endParaRPr lang="ja-JP" altLang="en-US" sz="2400"/>
+          </a:p>
+          <a:p>
+            <a:r>
+              <a:rPr lang="ja-JP" altLang="en-US" sz="2400"/>
+              <a:t>・水たまり（青丸）</a:t>
+            </a:r>
+            <a:endParaRPr lang="ja-JP" altLang="en-US" sz="2400"/>
+          </a:p>
+          <a:p>
+            <a:r>
+              <a:rPr lang="ja-JP" altLang="en-US" sz="2400"/>
+              <a:t>　泥沼エリア。足を取られて移動速度が大幅にダウン。</a:t>
+            </a:r>
+            <a:endParaRPr lang="ja-JP" altLang="en-US" sz="2400"/>
+          </a:p>
+          <a:p>
+            <a:endParaRPr lang="ja-JP" altLang="en-US" sz="2400"/>
+          </a:p>
+          <a:p>
+            <a:r>
+              <a:rPr lang="ja-JP" altLang="en-US" sz="2400"/>
+              <a:t>・開閉ゲート</a:t>
+            </a:r>
+            <a:endParaRPr lang="ja-JP" altLang="en-US" sz="2400"/>
+          </a:p>
+          <a:p>
+            <a:r>
+              <a:rPr lang="ja-JP" altLang="en-US" sz="2400"/>
+              <a:t>　一定間隔で開け閉めを繰り返す壁。タイミングが命。</a:t>
+            </a:r>
+            <a:endParaRPr lang="ja-JP" altLang="en-US" sz="2400"/>
+          </a:p>
+          <a:p>
+            <a:r>
+              <a:rPr lang="ja-JP" altLang="en-US" sz="2400"/>
+              <a:t>（緑：通過可能、赤：通過不可）</a:t>
+            </a:r>
+            <a:endParaRPr lang="ja-JP" altLang="en-US" sz="2400"/>
+          </a:p>
+        </p:txBody>
+      </p:sp>
+      <p:cxnSp>
+        <p:nvCxnSpPr>
+          <p:cNvPr id="10" name="直線矢印コネクタ 9"/>
+          <p:cNvCxnSpPr/>
+          <p:nvPr/>
+        </p:nvCxnSpPr>
+        <p:spPr>
+          <a:xfrm flipH="1">
+            <a:off x="4166235" y="1560195"/>
+            <a:ext cx="2589530" cy="1095375"/>
+          </a:xfrm>
+          <a:prstGeom prst="straightConnector1">
+            <a:avLst/>
+          </a:prstGeom>
+          <a:ln>
+            <a:solidFill>
+              <a:schemeClr val="tx1"/>
+            </a:solidFill>
+            <a:tailEnd type="arrow"/>
+          </a:ln>
+        </p:spPr>
+        <p:style>
+          <a:lnRef idx="2">
+            <a:schemeClr val="accent1"/>
+          </a:lnRef>
+          <a:fillRef idx="0">
+            <a:schemeClr val="accent1"/>
+          </a:fillRef>
+          <a:effectRef idx="1">
+            <a:schemeClr val="accent1"/>
+          </a:effectRef>
+          <a:fontRef idx="minor">
+            <a:schemeClr val="tx1"/>
+          </a:fontRef>
+        </p:style>
+      </p:cxnSp>
+      <p:cxnSp>
+        <p:nvCxnSpPr>
+          <p:cNvPr id="11" name="直線矢印コネクタ 10"/>
+          <p:cNvCxnSpPr/>
+          <p:nvPr/>
+        </p:nvCxnSpPr>
+        <p:spPr>
+          <a:xfrm flipH="1">
+            <a:off x="3715385" y="3351530"/>
+            <a:ext cx="3060700" cy="204470"/>
+          </a:xfrm>
+          <a:prstGeom prst="straightConnector1">
+            <a:avLst/>
+          </a:prstGeom>
+          <a:ln>
+            <a:tailEnd type="arrow"/>
+          </a:ln>
+        </p:spPr>
+        <p:style>
+          <a:lnRef idx="2">
+            <a:schemeClr val="accent1"/>
+          </a:lnRef>
+          <a:fillRef idx="0">
+            <a:schemeClr val="accent1"/>
+          </a:fillRef>
+          <a:effectRef idx="1">
+            <a:schemeClr val="accent1"/>
+          </a:effectRef>
+          <a:fontRef idx="minor">
+            <a:schemeClr val="tx1"/>
+          </a:fontRef>
+        </p:style>
+      </p:cxnSp>
+      <p:cxnSp>
+        <p:nvCxnSpPr>
+          <p:cNvPr id="12" name="直線矢印コネクタ 11"/>
+          <p:cNvCxnSpPr/>
+          <p:nvPr/>
+        </p:nvCxnSpPr>
+        <p:spPr>
+          <a:xfrm flipH="1" flipV="1">
+            <a:off x="4810760" y="4364990"/>
+            <a:ext cx="1986280" cy="470535"/>
+          </a:xfrm>
+          <a:prstGeom prst="straightConnector1">
+            <a:avLst/>
+          </a:prstGeom>
+          <a:ln>
+            <a:solidFill>
+              <a:schemeClr val="accent6">
+                <a:lumMod val="60000"/>
+                <a:lumOff val="40000"/>
+              </a:schemeClr>
+            </a:solidFill>
+            <a:tailEnd type="arrow"/>
+          </a:ln>
+        </p:spPr>
+        <p:style>
+          <a:lnRef idx="2">
+            <a:schemeClr val="accent1"/>
+          </a:lnRef>
+          <a:fillRef idx="0">
+            <a:schemeClr val="accent1"/>
+          </a:fillRef>
+          <a:effectRef idx="1">
+            <a:schemeClr val="accent1"/>
+          </a:effectRef>
+          <a:fontRef idx="minor">
+            <a:schemeClr val="tx1"/>
+          </a:fontRef>
+        </p:style>
+      </p:cxnSp>
+    </p:spTree>
   </p:cSld>
   <p:clrMapOvr>
     <a:masterClrMapping/>
@@ -3865,7 +4214,7 @@
     </a:clrScheme>
     <a:fontScheme name="Office">
       <a:majorFont>
-        <a:latin typeface="游ゴシック Light" panose="02110004020202020204"/>
+        <a:latin typeface="游ゴシック Light"/>
         <a:ea typeface=""/>
         <a:cs typeface=""/>
         <a:font script="Jpan" typeface="游ゴシック Light"/>
@@ -3898,26 +4247,9 @@
         <a:font script="Viet" typeface="Times New Roman"/>
         <a:font script="Uigh" typeface="Microsoft Uighur"/>
         <a:font script="Geor" typeface="Sylfaen"/>
-        <a:font script="Armn" typeface="Arial"/>
-        <a:font script="Bugi" typeface="Leelawadee UI"/>
-        <a:font script="Bopo" typeface="Microsoft JhengHei"/>
-        <a:font script="Java" typeface="Javanese Text"/>
-        <a:font script="Lisu" typeface="Segoe UI"/>
-        <a:font script="Mymr" typeface="Myanmar Text"/>
-        <a:font script="Nkoo" typeface="Ebrima"/>
-        <a:font script="Olck" typeface="Nirmala UI"/>
-        <a:font script="Osma" typeface="Ebrima"/>
-        <a:font script="Phag" typeface="Phagspa"/>
-        <a:font script="Syrn" typeface="Estrangelo Edessa"/>
-        <a:font script="Syrj" typeface="Estrangelo Edessa"/>
-        <a:font script="Syre" typeface="Estrangelo Edessa"/>
-        <a:font script="Sora" typeface="Nirmala UI"/>
-        <a:font script="Tale" typeface="Microsoft Tai Le"/>
-        <a:font script="Talu" typeface="Microsoft New Tai Lue"/>
-        <a:font script="Tfng" typeface="Ebrima"/>
       </a:majorFont>
       <a:minorFont>
-        <a:latin typeface="游ゴシック" panose="02110004020202020204"/>
+        <a:latin typeface="游ゴシック"/>
         <a:ea typeface=""/>
         <a:cs typeface=""/>
         <a:font script="Jpan" typeface="游ゴシック"/>
@@ -3950,23 +4282,6 @@
         <a:font script="Viet" typeface="Arial"/>
         <a:font script="Uigh" typeface="Microsoft Uighur"/>
         <a:font script="Geor" typeface="Sylfaen"/>
-        <a:font script="Armn" typeface="Arial"/>
-        <a:font script="Bugi" typeface="Leelawadee UI"/>
-        <a:font script="Bopo" typeface="Microsoft JhengHei"/>
-        <a:font script="Java" typeface="Javanese Text"/>
-        <a:font script="Lisu" typeface="Segoe UI"/>
-        <a:font script="Mymr" typeface="Myanmar Text"/>
-        <a:font script="Nkoo" typeface="Ebrima"/>
-        <a:font script="Olck" typeface="Nirmala UI"/>
-        <a:font script="Osma" typeface="Ebrima"/>
-        <a:font script="Phag" typeface="Phagspa"/>
-        <a:font script="Syrn" typeface="Estrangelo Edessa"/>
-        <a:font script="Syrj" typeface="Estrangelo Edessa"/>
-        <a:font script="Syre" typeface="Estrangelo Edessa"/>
-        <a:font script="Sora" typeface="Nirmala UI"/>
-        <a:font script="Tale" typeface="Microsoft Tai Le"/>
-        <a:font script="Talu" typeface="Microsoft New Tai Lue"/>
-        <a:font script="Tfng" typeface="Ebrima"/>
       </a:minorFont>
     </a:fontScheme>
     <a:fmtScheme name="Office">
@@ -4128,10 +4443,9 @@
       </a:style>
     </a:lnDef>
   </a:objectDefaults>
-  <a:extraClrSchemeLst/>
   <a:extLst>
     <a:ext uri="{05A4C25C-085E-4340-85A3-A5531E510DB2}">
-      <thm15:themeFamily xmlns:thm15="http://schemas.microsoft.com/office/thememl/2012/main" name="Office Theme" id="{2E142A2C-CD16-42D6-873A-C26D2A0506FA}" vid="{1BDDFF52-6CD6-40A5-AB3C-68EB2F1E4D0A}"/>
+      <thm15:themeFamily xmlns:thm15="http://schemas.microsoft.com/office/thememl/2012/main" name="Office Theme" id="{62F939B6-93AF-4DB8-9C6B-D6C7DFDC589F}" vid="{4A3C46E8-61CC-4603-A589-7422A47A8E4A}"/>
     </a:ext>
   </a:extLst>
 </a:theme>
